--- a/output_pptx/God_Is_Able.pptx
+++ b/output_pptx/God_Is_Able.pptx
@@ -3122,8 +3122,8 @@
         </p:nvSpPr>
         <p:spPr>
           <a:xfrm>
-            <a:off x="594360" y="2258568"/>
-            <a:ext cx="11002975" cy="685800"/>
+            <a:off x="640080" y="2052828"/>
+            <a:ext cx="10911535" cy="731520"/>
           </a:xfrm>
           <a:prstGeom prst="rect">
             <a:avLst/>
@@ -3138,7 +3138,7 @@
           <a:p>
             <a:pPr algn="ctr"/>
             <a:r>
-              <a:rPr sz="4400" b="1" i="0">
+              <a:rPr sz="4800" b="1" i="0">
                 <a:solidFill>
                   <a:srgbClr val="FFFFFF"/>
                 </a:solidFill>
@@ -3157,8 +3157,8 @@
         </p:nvSpPr>
         <p:spPr>
           <a:xfrm>
-            <a:off x="594360" y="2980944"/>
-            <a:ext cx="11002975" cy="347472"/>
+            <a:off x="640080" y="2985516"/>
+            <a:ext cx="10911535" cy="731520"/>
           </a:xfrm>
           <a:prstGeom prst="rect">
             <a:avLst/>
@@ -3173,83 +3173,13 @@
           <a:p>
             <a:pPr algn="ctr"/>
             <a:r>
-              <a:rPr sz="2200" b="0" i="1">
-                <a:solidFill>
-                  <a:srgbClr val="8C8C8C"/>
-                </a:solidFill>
-                <a:latin typeface="Arial"/>
-              </a:rPr>
-              <a:t/>
-            </a:r>
-          </a:p>
-        </p:txBody>
-      </p:sp>
-      <p:sp>
-        <p:nvSpPr>
-          <p:cNvPr id="4" name="TextBox 3"/>
-          <p:cNvSpPr txBox="1"/>
-          <p:nvPr/>
-        </p:nvSpPr>
-        <p:spPr>
-          <a:xfrm>
-            <a:off x="594360" y="3529584"/>
-            <a:ext cx="11002975" cy="685800"/>
-          </a:xfrm>
-          <a:prstGeom prst="rect">
-            <a:avLst/>
-          </a:prstGeom>
-          <a:noFill/>
-        </p:spPr>
-        <p:txBody>
-          <a:bodyPr wrap="square">
-            <a:spAutoFit/>
-          </a:bodyPr>
-          <a:lstStyle/>
-          <a:p>
-            <a:pPr algn="ctr"/>
-            <a:r>
-              <a:rPr sz="4400" b="1" i="0">
+              <a:rPr sz="4800" b="1" i="0">
                 <a:solidFill>
                   <a:srgbClr val="FFFFFF"/>
                 </a:solidFill>
                 <a:latin typeface="Arial"/>
               </a:rPr>
               <a:t>Maravilhoso Deus</a:t>
-            </a:r>
-          </a:p>
-        </p:txBody>
-      </p:sp>
-      <p:sp>
-        <p:nvSpPr>
-          <p:cNvPr id="5" name="TextBox 4"/>
-          <p:cNvSpPr txBox="1"/>
-          <p:nvPr/>
-        </p:nvSpPr>
-        <p:spPr>
-          <a:xfrm>
-            <a:off x="594360" y="4251960"/>
-            <a:ext cx="11002975" cy="347472"/>
-          </a:xfrm>
-          <a:prstGeom prst="rect">
-            <a:avLst/>
-          </a:prstGeom>
-          <a:noFill/>
-        </p:spPr>
-        <p:txBody>
-          <a:bodyPr wrap="square">
-            <a:spAutoFit/>
-          </a:bodyPr>
-          <a:lstStyle/>
-          <a:p>
-            <a:pPr algn="ctr"/>
-            <a:r>
-              <a:rPr sz="2200" b="0" i="1">
-                <a:solidFill>
-                  <a:srgbClr val="8C8C8C"/>
-                </a:solidFill>
-                <a:latin typeface="Arial"/>
-              </a:rPr>
-              <a:t/>
             </a:r>
           </a:p>
         </p:txBody>
@@ -3288,8 +3218,8 @@
         </p:nvSpPr>
         <p:spPr>
           <a:xfrm>
-            <a:off x="594360" y="2683764"/>
-            <a:ext cx="11002975" cy="685800"/>
+            <a:off x="640080" y="2500884"/>
+            <a:ext cx="10911535" cy="731520"/>
           </a:xfrm>
           <a:prstGeom prst="rect">
             <a:avLst/>
@@ -3304,7 +3234,7 @@
           <a:p>
             <a:pPr algn="ctr"/>
             <a:r>
-              <a:rPr sz="4400" b="1" i="0">
+              <a:rPr sz="4800" b="1" i="0">
                 <a:solidFill>
                   <a:srgbClr val="FFFFFF"/>
                 </a:solidFill>
@@ -3323,8 +3253,8 @@
         </p:nvSpPr>
         <p:spPr>
           <a:xfrm>
-            <a:off x="594360" y="3406140"/>
-            <a:ext cx="11002975" cy="384048"/>
+            <a:off x="640080" y="3268980"/>
+            <a:ext cx="10911535" cy="365760"/>
           </a:xfrm>
           <a:prstGeom prst="rect">
             <a:avLst/>
@@ -3341,7 +3271,7 @@
             <a:r>
               <a:rPr sz="2400" b="0" i="1">
                 <a:solidFill>
-                  <a:srgbClr val="B4B4B4"/>
+                  <a:srgbClr val="AAAAAA"/>
                 </a:solidFill>
                 <a:latin typeface="Arial"/>
               </a:rPr>
@@ -3358,8 +3288,8 @@
         </p:nvSpPr>
         <p:spPr>
           <a:xfrm>
-            <a:off x="594360" y="3826764"/>
-            <a:ext cx="11002975" cy="347472"/>
+            <a:off x="640080" y="4046220"/>
+            <a:ext cx="10911535" cy="310896"/>
           </a:xfrm>
           <a:prstGeom prst="rect">
             <a:avLst/>
@@ -3376,11 +3306,11 @@
             <a:r>
               <a:rPr sz="2000" b="0" i="1">
                 <a:solidFill>
-                  <a:srgbClr val="8C8C8C"/>
+                  <a:srgbClr val="828282"/>
                 </a:solidFill>
                 <a:latin typeface="Arial"/>
               </a:rPr>
-              <a:t/>
+              <a:t>Mais que buscamos</a:t>
             </a:r>
           </a:p>
         </p:txBody>
@@ -3419,8 +3349,8 @@
         </p:nvSpPr>
         <p:spPr>
           <a:xfrm>
-            <a:off x="594360" y="2258568"/>
-            <a:ext cx="11002975" cy="685800"/>
+            <a:off x="640080" y="2052828"/>
+            <a:ext cx="10911535" cy="731520"/>
           </a:xfrm>
           <a:prstGeom prst="rect">
             <a:avLst/>
@@ -3435,7 +3365,7 @@
           <a:p>
             <a:pPr algn="ctr"/>
             <a:r>
-              <a:rPr sz="4400" b="1" i="0">
+              <a:rPr sz="4800" b="1" i="0">
                 <a:solidFill>
                   <a:srgbClr val="FFFFFF"/>
                 </a:solidFill>
@@ -3454,8 +3384,8 @@
         </p:nvSpPr>
         <p:spPr>
           <a:xfrm>
-            <a:off x="594360" y="2980944"/>
-            <a:ext cx="11002975" cy="347472"/>
+            <a:off x="640080" y="2985516"/>
+            <a:ext cx="10911535" cy="731520"/>
           </a:xfrm>
           <a:prstGeom prst="rect">
             <a:avLst/>
@@ -3470,83 +3400,13 @@
           <a:p>
             <a:pPr algn="ctr"/>
             <a:r>
-              <a:rPr sz="2200" b="0" i="1">
-                <a:solidFill>
-                  <a:srgbClr val="8C8C8C"/>
-                </a:solidFill>
-                <a:latin typeface="Arial"/>
-              </a:rPr>
-              <a:t/>
-            </a:r>
-          </a:p>
-        </p:txBody>
-      </p:sp>
-      <p:sp>
-        <p:nvSpPr>
-          <p:cNvPr id="4" name="TextBox 3"/>
-          <p:cNvSpPr txBox="1"/>
-          <p:nvPr/>
-        </p:nvSpPr>
-        <p:spPr>
-          <a:xfrm>
-            <a:off x="594360" y="3529584"/>
-            <a:ext cx="11002975" cy="685800"/>
-          </a:xfrm>
-          <a:prstGeom prst="rect">
-            <a:avLst/>
-          </a:prstGeom>
-          <a:noFill/>
-        </p:spPr>
-        <p:txBody>
-          <a:bodyPr wrap="square">
-            <a:spAutoFit/>
-          </a:bodyPr>
-          <a:lstStyle/>
-          <a:p>
-            <a:pPr algn="ctr"/>
-            <a:r>
-              <a:rPr sz="4400" b="1" i="0">
+              <a:rPr sz="4800" b="1" i="0">
                 <a:solidFill>
                   <a:srgbClr val="FFFFFF"/>
                 </a:solidFill>
                 <a:latin typeface="Arial"/>
               </a:rPr>
               <a:t>Mais que sabemos</a:t>
-            </a:r>
-          </a:p>
-        </p:txBody>
-      </p:sp>
-      <p:sp>
-        <p:nvSpPr>
-          <p:cNvPr id="5" name="TextBox 4"/>
-          <p:cNvSpPr txBox="1"/>
-          <p:nvPr/>
-        </p:nvSpPr>
-        <p:spPr>
-          <a:xfrm>
-            <a:off x="594360" y="4251960"/>
-            <a:ext cx="11002975" cy="347472"/>
-          </a:xfrm>
-          <a:prstGeom prst="rect">
-            <a:avLst/>
-          </a:prstGeom>
-          <a:noFill/>
-        </p:spPr>
-        <p:txBody>
-          <a:bodyPr wrap="square">
-            <a:spAutoFit/>
-          </a:bodyPr>
-          <a:lstStyle/>
-          <a:p>
-            <a:pPr algn="ctr"/>
-            <a:r>
-              <a:rPr sz="2200" b="0" i="1">
-                <a:solidFill>
-                  <a:srgbClr val="8C8C8C"/>
-                </a:solidFill>
-                <a:latin typeface="Arial"/>
-              </a:rPr>
-              <a:t/>
             </a:r>
           </a:p>
         </p:txBody>
@@ -3585,8 +3445,8 @@
         </p:nvSpPr>
         <p:spPr>
           <a:xfrm>
-            <a:off x="594360" y="2258568"/>
-            <a:ext cx="11002975" cy="685800"/>
+            <a:off x="640080" y="2052828"/>
+            <a:ext cx="10911535" cy="731520"/>
           </a:xfrm>
           <a:prstGeom prst="rect">
             <a:avLst/>
@@ -3601,7 +3461,7 @@
           <a:p>
             <a:pPr algn="ctr"/>
             <a:r>
-              <a:rPr sz="4400" b="1" i="0">
+              <a:rPr sz="4800" b="1" i="0">
                 <a:solidFill>
                   <a:srgbClr val="FFFFFF"/>
                 </a:solidFill>
@@ -3620,8 +3480,8 @@
         </p:nvSpPr>
         <p:spPr>
           <a:xfrm>
-            <a:off x="594360" y="2980944"/>
-            <a:ext cx="11002975" cy="347472"/>
+            <a:off x="640080" y="2985516"/>
+            <a:ext cx="10911535" cy="731520"/>
           </a:xfrm>
           <a:prstGeom prst="rect">
             <a:avLst/>
@@ -3636,83 +3496,13 @@
           <a:p>
             <a:pPr algn="ctr"/>
             <a:r>
-              <a:rPr sz="2200" b="0" i="1">
-                <a:solidFill>
-                  <a:srgbClr val="8C8C8C"/>
-                </a:solidFill>
-                <a:latin typeface="Arial"/>
-              </a:rPr>
-              <a:t/>
-            </a:r>
-          </a:p>
-        </p:txBody>
-      </p:sp>
-      <p:sp>
-        <p:nvSpPr>
-          <p:cNvPr id="4" name="TextBox 3"/>
-          <p:cNvSpPr txBox="1"/>
-          <p:nvPr/>
-        </p:nvSpPr>
-        <p:spPr>
-          <a:xfrm>
-            <a:off x="594360" y="3529584"/>
-            <a:ext cx="11002975" cy="685800"/>
-          </a:xfrm>
-          <a:prstGeom prst="rect">
-            <a:avLst/>
-          </a:prstGeom>
-          <a:noFill/>
-        </p:spPr>
-        <p:txBody>
-          <a:bodyPr wrap="square">
-            <a:spAutoFit/>
-          </a:bodyPr>
-          <a:lstStyle/>
-          <a:p>
-            <a:pPr algn="ctr"/>
-            <a:r>
-              <a:rPr sz="4400" b="1" i="0">
+              <a:rPr sz="4800" b="1" i="0">
                 <a:solidFill>
                   <a:srgbClr val="FFFFFF"/>
                 </a:solidFill>
                 <a:latin typeface="Arial"/>
               </a:rPr>
               <a:t>Grandes coisas faz</a:t>
-            </a:r>
-          </a:p>
-        </p:txBody>
-      </p:sp>
-      <p:sp>
-        <p:nvSpPr>
-          <p:cNvPr id="5" name="TextBox 4"/>
-          <p:cNvSpPr txBox="1"/>
-          <p:nvPr/>
-        </p:nvSpPr>
-        <p:spPr>
-          <a:xfrm>
-            <a:off x="594360" y="4251960"/>
-            <a:ext cx="11002975" cy="347472"/>
-          </a:xfrm>
-          <a:prstGeom prst="rect">
-            <a:avLst/>
-          </a:prstGeom>
-          <a:noFill/>
-        </p:spPr>
-        <p:txBody>
-          <a:bodyPr wrap="square">
-            <a:spAutoFit/>
-          </a:bodyPr>
-          <a:lstStyle/>
-          <a:p>
-            <a:pPr algn="ctr"/>
-            <a:r>
-              <a:rPr sz="2200" b="0" i="1">
-                <a:solidFill>
-                  <a:srgbClr val="8C8C8C"/>
-                </a:solidFill>
-                <a:latin typeface="Arial"/>
-              </a:rPr>
-              <a:t/>
             </a:r>
           </a:p>
         </p:txBody>
@@ -3751,8 +3541,8 @@
         </p:nvSpPr>
         <p:spPr>
           <a:xfrm>
-            <a:off x="594360" y="1837944"/>
-            <a:ext cx="11002975" cy="685800"/>
+            <a:off x="640080" y="1650492"/>
+            <a:ext cx="10911535" cy="731520"/>
           </a:xfrm>
           <a:prstGeom prst="rect">
             <a:avLst/>
@@ -3767,7 +3557,7 @@
           <a:p>
             <a:pPr algn="ctr"/>
             <a:r>
-              <a:rPr sz="4400" b="1" i="0">
+              <a:rPr sz="4800" b="1" i="0">
                 <a:solidFill>
                   <a:srgbClr val="FFFFFF"/>
                 </a:solidFill>
@@ -3786,8 +3576,8 @@
         </p:nvSpPr>
         <p:spPr>
           <a:xfrm>
-            <a:off x="594360" y="2560320"/>
-            <a:ext cx="11002975" cy="384048"/>
+            <a:off x="640080" y="2418588"/>
+            <a:ext cx="10911535" cy="365760"/>
           </a:xfrm>
           <a:prstGeom prst="rect">
             <a:avLst/>
@@ -3804,7 +3594,7 @@
             <a:r>
               <a:rPr sz="2400" b="0" i="1">
                 <a:solidFill>
-                  <a:srgbClr val="B4B4B4"/>
+                  <a:srgbClr val="AAAAAA"/>
                 </a:solidFill>
                 <a:latin typeface="Arial"/>
               </a:rPr>
@@ -3821,8 +3611,8 @@
         </p:nvSpPr>
         <p:spPr>
           <a:xfrm>
-            <a:off x="594360" y="2980944"/>
-            <a:ext cx="11002975" cy="347472"/>
+            <a:off x="640080" y="2985516"/>
+            <a:ext cx="10911535" cy="731520"/>
           </a:xfrm>
           <a:prstGeom prst="rect">
             <a:avLst/>
@@ -3837,13 +3627,13 @@
           <a:p>
             <a:pPr algn="ctr"/>
             <a:r>
-              <a:rPr sz="2000" b="0" i="1">
-                <a:solidFill>
-                  <a:srgbClr val="8C8C8C"/>
+              <a:rPr sz="4800" b="1" i="0">
+                <a:solidFill>
+                  <a:srgbClr val="FFFFFF"/>
                 </a:solidFill>
                 <a:latin typeface="Arial"/>
               </a:rPr>
-              <a:t/>
+              <a:t>主の名で 打ち勝てる</a:t>
             </a:r>
           </a:p>
         </p:txBody>
@@ -3856,8 +3646,8 @@
         </p:nvSpPr>
         <p:spPr>
           <a:xfrm>
-            <a:off x="594360" y="3529584"/>
-            <a:ext cx="11002975" cy="685800"/>
+            <a:off x="640080" y="3753612"/>
+            <a:ext cx="10911535" cy="365760"/>
           </a:xfrm>
           <a:prstGeom prst="rect">
             <a:avLst/>
@@ -3872,13 +3662,13 @@
           <a:p>
             <a:pPr algn="ctr"/>
             <a:r>
-              <a:rPr sz="4400" b="1" i="0">
-                <a:solidFill>
-                  <a:srgbClr val="FFFFFF"/>
+              <a:rPr sz="2400" b="0" i="1">
+                <a:solidFill>
+                  <a:srgbClr val="AAAAAA"/>
                 </a:solidFill>
                 <a:latin typeface="Arial"/>
               </a:rPr>
-              <a:t>主の名で 打ち勝てる</a:t>
+              <a:t>shu no na de uchikateru</a:t>
             </a:r>
           </a:p>
         </p:txBody>
@@ -3891,8 +3681,8 @@
         </p:nvSpPr>
         <p:spPr>
           <a:xfrm>
-            <a:off x="594360" y="4251960"/>
-            <a:ext cx="11002975" cy="384048"/>
+            <a:off x="640080" y="4530852"/>
+            <a:ext cx="10911535" cy="310896"/>
           </a:xfrm>
           <a:prstGeom prst="rect">
             <a:avLst/>
@@ -3907,13 +3697,13 @@
           <a:p>
             <a:pPr algn="ctr"/>
             <a:r>
-              <a:rPr sz="2400" b="0" i="1">
-                <a:solidFill>
-                  <a:srgbClr val="B4B4B4"/>
+              <a:rPr sz="2000" b="0" i="1">
+                <a:solidFill>
+                  <a:srgbClr val="828282"/>
                 </a:solidFill>
                 <a:latin typeface="Arial"/>
               </a:rPr>
-              <a:t>shu no na de uchikateru</a:t>
+              <a:t>Ressurgiu, e a morte venceu</a:t>
             </a:r>
           </a:p>
         </p:txBody>
@@ -3926,8 +3716,8 @@
         </p:nvSpPr>
         <p:spPr>
           <a:xfrm>
-            <a:off x="594360" y="4672584"/>
-            <a:ext cx="11002975" cy="347472"/>
+            <a:off x="640080" y="4896612"/>
+            <a:ext cx="10911535" cy="310896"/>
           </a:xfrm>
           <a:prstGeom prst="rect">
             <a:avLst/>
@@ -3944,11 +3734,11 @@
             <a:r>
               <a:rPr sz="2000" b="0" i="1">
                 <a:solidFill>
-                  <a:srgbClr val="8C8C8C"/>
+                  <a:srgbClr val="828282"/>
                 </a:solidFill>
                 <a:latin typeface="Arial"/>
               </a:rPr>
-              <a:t/>
+              <a:t>Nosso Deus é poderoso</a:t>
             </a:r>
           </a:p>
         </p:txBody>
@@ -3987,8 +3777,8 @@
         </p:nvSpPr>
         <p:spPr>
           <a:xfrm>
-            <a:off x="594360" y="2683764"/>
-            <a:ext cx="11002975" cy="685800"/>
+            <a:off x="640080" y="2500884"/>
+            <a:ext cx="10911535" cy="731520"/>
           </a:xfrm>
           <a:prstGeom prst="rect">
             <a:avLst/>
@@ -4003,7 +3793,7 @@
           <a:p>
             <a:pPr algn="ctr"/>
             <a:r>
-              <a:rPr sz="4400" b="1" i="0">
+              <a:rPr sz="4800" b="1" i="0">
                 <a:solidFill>
                   <a:srgbClr val="FFFFFF"/>
                 </a:solidFill>
@@ -4022,8 +3812,8 @@
         </p:nvSpPr>
         <p:spPr>
           <a:xfrm>
-            <a:off x="594360" y="3406140"/>
-            <a:ext cx="11002975" cy="384048"/>
+            <a:off x="640080" y="3268980"/>
+            <a:ext cx="10911535" cy="365760"/>
           </a:xfrm>
           <a:prstGeom prst="rect">
             <a:avLst/>
@@ -4040,7 +3830,7 @@
             <a:r>
               <a:rPr sz="2400" b="0" i="1">
                 <a:solidFill>
-                  <a:srgbClr val="B4B4B4"/>
+                  <a:srgbClr val="AAAAAA"/>
                 </a:solidFill>
                 <a:latin typeface="Arial"/>
               </a:rPr>
@@ -4057,8 +3847,8 @@
         </p:nvSpPr>
         <p:spPr>
           <a:xfrm>
-            <a:off x="594360" y="3826764"/>
-            <a:ext cx="11002975" cy="347472"/>
+            <a:off x="640080" y="4046220"/>
+            <a:ext cx="10911535" cy="310896"/>
           </a:xfrm>
           <a:prstGeom prst="rect">
             <a:avLst/>
@@ -4075,11 +3865,11 @@
             <a:r>
               <a:rPr sz="2000" b="0" i="1">
                 <a:solidFill>
-                  <a:srgbClr val="8C8C8C"/>
+                  <a:srgbClr val="828282"/>
                 </a:solidFill>
                 <a:latin typeface="Arial"/>
               </a:rPr>
-              <a:t/>
+              <a:t>Em seu nome vamos vencer</a:t>
             </a:r>
           </a:p>
         </p:txBody>
@@ -4118,8 +3908,8 @@
         </p:nvSpPr>
         <p:spPr>
           <a:xfrm>
-            <a:off x="594360" y="2258568"/>
-            <a:ext cx="11002975" cy="685800"/>
+            <a:off x="640080" y="2052828"/>
+            <a:ext cx="10911535" cy="731520"/>
           </a:xfrm>
           <a:prstGeom prst="rect">
             <a:avLst/>
@@ -4134,7 +3924,7 @@
           <a:p>
             <a:pPr algn="ctr"/>
             <a:r>
-              <a:rPr sz="4400" b="1" i="0">
+              <a:rPr sz="4800" b="1" i="0">
                 <a:solidFill>
                   <a:srgbClr val="FFFFFF"/>
                 </a:solidFill>
@@ -4153,8 +3943,8 @@
         </p:nvSpPr>
         <p:spPr>
           <a:xfrm>
-            <a:off x="594360" y="2980944"/>
-            <a:ext cx="11002975" cy="347472"/>
+            <a:off x="640080" y="2985516"/>
+            <a:ext cx="10911535" cy="731520"/>
           </a:xfrm>
           <a:prstGeom prst="rect">
             <a:avLst/>
@@ -4169,83 +3959,13 @@
           <a:p>
             <a:pPr algn="ctr"/>
             <a:r>
-              <a:rPr sz="2200" b="0" i="1">
-                <a:solidFill>
-                  <a:srgbClr val="8C8C8C"/>
-                </a:solidFill>
-                <a:latin typeface="Arial"/>
-              </a:rPr>
-              <a:t/>
-            </a:r>
-          </a:p>
-        </p:txBody>
-      </p:sp>
-      <p:sp>
-        <p:nvSpPr>
-          <p:cNvPr id="4" name="TextBox 3"/>
-          <p:cNvSpPr txBox="1"/>
-          <p:nvPr/>
-        </p:nvSpPr>
-        <p:spPr>
-          <a:xfrm>
-            <a:off x="594360" y="3529584"/>
-            <a:ext cx="11002975" cy="685800"/>
-          </a:xfrm>
-          <a:prstGeom prst="rect">
-            <a:avLst/>
-          </a:prstGeom>
-          <a:noFill/>
-        </p:spPr>
-        <p:txBody>
-          <a:bodyPr wrap="square">
-            <a:spAutoFit/>
-          </a:bodyPr>
-          <a:lstStyle/>
-          <a:p>
-            <a:pPr algn="ctr"/>
-            <a:r>
-              <a:rPr sz="4400" b="1" i="0">
+              <a:rPr sz="4800" b="1" i="0">
                 <a:solidFill>
                   <a:srgbClr val="FFFFFF"/>
                 </a:solidFill>
                 <a:latin typeface="Arial"/>
               </a:rPr>
               <a:t>Nosso Deus é poderoso</a:t>
-            </a:r>
-          </a:p>
-        </p:txBody>
-      </p:sp>
-      <p:sp>
-        <p:nvSpPr>
-          <p:cNvPr id="5" name="TextBox 4"/>
-          <p:cNvSpPr txBox="1"/>
-          <p:nvPr/>
-        </p:nvSpPr>
-        <p:spPr>
-          <a:xfrm>
-            <a:off x="594360" y="4251960"/>
-            <a:ext cx="11002975" cy="347472"/>
-          </a:xfrm>
-          <a:prstGeom prst="rect">
-            <a:avLst/>
-          </a:prstGeom>
-          <a:noFill/>
-        </p:spPr>
-        <p:txBody>
-          <a:bodyPr wrap="square">
-            <a:spAutoFit/>
-          </a:bodyPr>
-          <a:lstStyle/>
-          <a:p>
-            <a:pPr algn="ctr"/>
-            <a:r>
-              <a:rPr sz="2200" b="0" i="1">
-                <a:solidFill>
-                  <a:srgbClr val="8C8C8C"/>
-                </a:solidFill>
-                <a:latin typeface="Arial"/>
-              </a:rPr>
-              <a:t/>
             </a:r>
           </a:p>
         </p:txBody>
@@ -4284,8 +4004,8 @@
         </p:nvSpPr>
         <p:spPr>
           <a:xfrm>
-            <a:off x="594360" y="2258568"/>
-            <a:ext cx="11002975" cy="685800"/>
+            <a:off x="640080" y="2052828"/>
+            <a:ext cx="10911535" cy="731520"/>
           </a:xfrm>
           <a:prstGeom prst="rect">
             <a:avLst/>
@@ -4300,7 +4020,7 @@
           <a:p>
             <a:pPr algn="ctr"/>
             <a:r>
-              <a:rPr sz="4400" b="1" i="0">
+              <a:rPr sz="4800" b="1" i="0">
                 <a:solidFill>
                   <a:srgbClr val="FFFFFF"/>
                 </a:solidFill>
@@ -4319,8 +4039,8 @@
         </p:nvSpPr>
         <p:spPr>
           <a:xfrm>
-            <a:off x="594360" y="2980944"/>
-            <a:ext cx="11002975" cy="347472"/>
+            <a:off x="640080" y="2985516"/>
+            <a:ext cx="10911535" cy="731520"/>
           </a:xfrm>
           <a:prstGeom prst="rect">
             <a:avLst/>
@@ -4335,83 +4055,13 @@
           <a:p>
             <a:pPr algn="ctr"/>
             <a:r>
-              <a:rPr sz="2200" b="0" i="1">
-                <a:solidFill>
-                  <a:srgbClr val="8C8C8C"/>
-                </a:solidFill>
-                <a:latin typeface="Arial"/>
-              </a:rPr>
-              <a:t/>
-            </a:r>
-          </a:p>
-        </p:txBody>
-      </p:sp>
-      <p:sp>
-        <p:nvSpPr>
-          <p:cNvPr id="4" name="TextBox 3"/>
-          <p:cNvSpPr txBox="1"/>
-          <p:nvPr/>
-        </p:nvSpPr>
-        <p:spPr>
-          <a:xfrm>
-            <a:off x="594360" y="3529584"/>
-            <a:ext cx="11002975" cy="685800"/>
-          </a:xfrm>
-          <a:prstGeom prst="rect">
-            <a:avLst/>
-          </a:prstGeom>
-          <a:noFill/>
-        </p:spPr>
-        <p:txBody>
-          <a:bodyPr wrap="square">
-            <a:spAutoFit/>
-          </a:bodyPr>
-          <a:lstStyle/>
-          <a:p>
-            <a:pPr algn="ctr"/>
-            <a:r>
-              <a:rPr sz="4400" b="1" i="0">
+              <a:rPr sz="4800" b="1" i="0">
                 <a:solidFill>
                   <a:srgbClr val="FFFFFF"/>
                 </a:solidFill>
                 <a:latin typeface="Arial"/>
               </a:rPr>
               <a:t>Nosso Deus é poderoso</a:t>
-            </a:r>
-          </a:p>
-        </p:txBody>
-      </p:sp>
-      <p:sp>
-        <p:nvSpPr>
-          <p:cNvPr id="5" name="TextBox 4"/>
-          <p:cNvSpPr txBox="1"/>
-          <p:nvPr/>
-        </p:nvSpPr>
-        <p:spPr>
-          <a:xfrm>
-            <a:off x="594360" y="4251960"/>
-            <a:ext cx="11002975" cy="347472"/>
-          </a:xfrm>
-          <a:prstGeom prst="rect">
-            <a:avLst/>
-          </a:prstGeom>
-          <a:noFill/>
-        </p:spPr>
-        <p:txBody>
-          <a:bodyPr wrap="square">
-            <a:spAutoFit/>
-          </a:bodyPr>
-          <a:lstStyle/>
-          <a:p>
-            <a:pPr algn="ctr"/>
-            <a:r>
-              <a:rPr sz="2200" b="0" i="1">
-                <a:solidFill>
-                  <a:srgbClr val="8C8C8C"/>
-                </a:solidFill>
-                <a:latin typeface="Arial"/>
-              </a:rPr>
-              <a:t/>
             </a:r>
           </a:p>
         </p:txBody>
@@ -4450,8 +4100,8 @@
         </p:nvSpPr>
         <p:spPr>
           <a:xfrm>
-            <a:off x="594360" y="2258568"/>
-            <a:ext cx="11002975" cy="685800"/>
+            <a:off x="640080" y="2052828"/>
+            <a:ext cx="10911535" cy="731520"/>
           </a:xfrm>
           <a:prstGeom prst="rect">
             <a:avLst/>
@@ -4466,7 +4116,7 @@
           <a:p>
             <a:pPr algn="ctr"/>
             <a:r>
-              <a:rPr sz="4400" b="1" i="0">
+              <a:rPr sz="4800" b="1" i="0">
                 <a:solidFill>
                   <a:srgbClr val="FFFFFF"/>
                 </a:solidFill>
@@ -4485,8 +4135,8 @@
         </p:nvSpPr>
         <p:spPr>
           <a:xfrm>
-            <a:off x="594360" y="2980944"/>
-            <a:ext cx="11002975" cy="347472"/>
+            <a:off x="640080" y="2985516"/>
+            <a:ext cx="10911535" cy="731520"/>
           </a:xfrm>
           <a:prstGeom prst="rect">
             <a:avLst/>
@@ -4501,83 +4151,13 @@
           <a:p>
             <a:pPr algn="ctr"/>
             <a:r>
-              <a:rPr sz="2200" b="0" i="1">
-                <a:solidFill>
-                  <a:srgbClr val="8C8C8C"/>
-                </a:solidFill>
-                <a:latin typeface="Arial"/>
-              </a:rPr>
-              <a:t/>
-            </a:r>
-          </a:p>
-        </p:txBody>
-      </p:sp>
-      <p:sp>
-        <p:nvSpPr>
-          <p:cNvPr id="4" name="TextBox 3"/>
-          <p:cNvSpPr txBox="1"/>
-          <p:nvPr/>
-        </p:nvSpPr>
-        <p:spPr>
-          <a:xfrm>
-            <a:off x="594360" y="3529584"/>
-            <a:ext cx="11002975" cy="685800"/>
-          </a:xfrm>
-          <a:prstGeom prst="rect">
-            <a:avLst/>
-          </a:prstGeom>
-          <a:noFill/>
-        </p:spPr>
-        <p:txBody>
-          <a:bodyPr wrap="square">
-            <a:spAutoFit/>
-          </a:bodyPr>
-          <a:lstStyle/>
-          <a:p>
-            <a:pPr algn="ctr"/>
-            <a:r>
-              <a:rPr sz="4400" b="1" i="0">
+              <a:rPr sz="4800" b="1" i="0">
                 <a:solidFill>
                   <a:srgbClr val="FFFFFF"/>
                 </a:solidFill>
                 <a:latin typeface="Arial"/>
               </a:rPr>
               <a:t>Em seu nome vamos vencer</a:t>
-            </a:r>
-          </a:p>
-        </p:txBody>
-      </p:sp>
-      <p:sp>
-        <p:nvSpPr>
-          <p:cNvPr id="5" name="TextBox 4"/>
-          <p:cNvSpPr txBox="1"/>
-          <p:nvPr/>
-        </p:nvSpPr>
-        <p:spPr>
-          <a:xfrm>
-            <a:off x="594360" y="4251960"/>
-            <a:ext cx="11002975" cy="347472"/>
-          </a:xfrm>
-          <a:prstGeom prst="rect">
-            <a:avLst/>
-          </a:prstGeom>
-          <a:noFill/>
-        </p:spPr>
-        <p:txBody>
-          <a:bodyPr wrap="square">
-            <a:spAutoFit/>
-          </a:bodyPr>
-          <a:lstStyle/>
-          <a:p>
-            <a:pPr algn="ctr"/>
-            <a:r>
-              <a:rPr sz="2200" b="0" i="1">
-                <a:solidFill>
-                  <a:srgbClr val="8C8C8C"/>
-                </a:solidFill>
-                <a:latin typeface="Arial"/>
-              </a:rPr>
-              <a:t/>
             </a:r>
           </a:p>
         </p:txBody>
@@ -4616,8 +4196,8 @@
         </p:nvSpPr>
         <p:spPr>
           <a:xfrm>
-            <a:off x="594360" y="2258568"/>
-            <a:ext cx="11002975" cy="685800"/>
+            <a:off x="640080" y="2052828"/>
+            <a:ext cx="10911535" cy="731520"/>
           </a:xfrm>
           <a:prstGeom prst="rect">
             <a:avLst/>
@@ -4632,7 +4212,7 @@
           <a:p>
             <a:pPr algn="ctr"/>
             <a:r>
-              <a:rPr sz="4400" b="1" i="0">
+              <a:rPr sz="4800" b="1" i="0">
                 <a:solidFill>
                   <a:srgbClr val="FFFFFF"/>
                 </a:solidFill>
@@ -4651,8 +4231,8 @@
         </p:nvSpPr>
         <p:spPr>
           <a:xfrm>
-            <a:off x="594360" y="2980944"/>
-            <a:ext cx="11002975" cy="347472"/>
+            <a:off x="640080" y="2985516"/>
+            <a:ext cx="10911535" cy="731520"/>
           </a:xfrm>
           <a:prstGeom prst="rect">
             <a:avLst/>
@@ -4667,83 +4247,13 @@
           <a:p>
             <a:pPr algn="ctr"/>
             <a:r>
-              <a:rPr sz="2200" b="0" i="1">
-                <a:solidFill>
-                  <a:srgbClr val="8C8C8C"/>
-                </a:solidFill>
-                <a:latin typeface="Arial"/>
-              </a:rPr>
-              <a:t/>
-            </a:r>
-          </a:p>
-        </p:txBody>
-      </p:sp>
-      <p:sp>
-        <p:nvSpPr>
-          <p:cNvPr id="4" name="TextBox 3"/>
-          <p:cNvSpPr txBox="1"/>
-          <p:nvPr/>
-        </p:nvSpPr>
-        <p:spPr>
-          <a:xfrm>
-            <a:off x="594360" y="3529584"/>
-            <a:ext cx="11002975" cy="685800"/>
-          </a:xfrm>
-          <a:prstGeom prst="rect">
-            <a:avLst/>
-          </a:prstGeom>
-          <a:noFill/>
-        </p:spPr>
-        <p:txBody>
-          <a:bodyPr wrap="square">
-            <a:spAutoFit/>
-          </a:bodyPr>
-          <a:lstStyle/>
-          <a:p>
-            <a:pPr algn="ctr"/>
-            <a:r>
-              <a:rPr sz="4400" b="1" i="0">
+              <a:rPr sz="4800" b="1" i="0">
                 <a:solidFill>
                   <a:srgbClr val="FFFFFF"/>
                 </a:solidFill>
                 <a:latin typeface="Arial"/>
               </a:rPr>
               <a:t>Deus conosco, nos conduzirá</a:t>
-            </a:r>
-          </a:p>
-        </p:txBody>
-      </p:sp>
-      <p:sp>
-        <p:nvSpPr>
-          <p:cNvPr id="5" name="TextBox 4"/>
-          <p:cNvSpPr txBox="1"/>
-          <p:nvPr/>
-        </p:nvSpPr>
-        <p:spPr>
-          <a:xfrm>
-            <a:off x="594360" y="4251960"/>
-            <a:ext cx="11002975" cy="347472"/>
-          </a:xfrm>
-          <a:prstGeom prst="rect">
-            <a:avLst/>
-          </a:prstGeom>
-          <a:noFill/>
-        </p:spPr>
-        <p:txBody>
-          <a:bodyPr wrap="square">
-            <a:spAutoFit/>
-          </a:bodyPr>
-          <a:lstStyle/>
-          <a:p>
-            <a:pPr algn="ctr"/>
-            <a:r>
-              <a:rPr sz="2200" b="0" i="1">
-                <a:solidFill>
-                  <a:srgbClr val="8C8C8C"/>
-                </a:solidFill>
-                <a:latin typeface="Arial"/>
-              </a:rPr>
-              <a:t/>
             </a:r>
           </a:p>
         </p:txBody>
@@ -4782,8 +4292,8 @@
         </p:nvSpPr>
         <p:spPr>
           <a:xfrm>
-            <a:off x="594360" y="2258568"/>
-            <a:ext cx="11002975" cy="685800"/>
+            <a:off x="640080" y="2052828"/>
+            <a:ext cx="10911535" cy="731520"/>
           </a:xfrm>
           <a:prstGeom prst="rect">
             <a:avLst/>
@@ -4798,7 +4308,7 @@
           <a:p>
             <a:pPr algn="ctr"/>
             <a:r>
-              <a:rPr sz="4400" b="1" i="0">
+              <a:rPr sz="4800" b="1" i="0">
                 <a:solidFill>
                   <a:srgbClr val="FFFFFF"/>
                 </a:solidFill>
@@ -4817,8 +4327,8 @@
         </p:nvSpPr>
         <p:spPr>
           <a:xfrm>
-            <a:off x="594360" y="2980944"/>
-            <a:ext cx="11002975" cy="347472"/>
+            <a:off x="640080" y="2985516"/>
+            <a:ext cx="10911535" cy="731520"/>
           </a:xfrm>
           <a:prstGeom prst="rect">
             <a:avLst/>
@@ -4833,83 +4343,13 @@
           <a:p>
             <a:pPr algn="ctr"/>
             <a:r>
-              <a:rPr sz="2200" b="0" i="1">
-                <a:solidFill>
-                  <a:srgbClr val="8C8C8C"/>
-                </a:solidFill>
-                <a:latin typeface="Arial"/>
-              </a:rPr>
-              <a:t/>
-            </a:r>
-          </a:p>
-        </p:txBody>
-      </p:sp>
-      <p:sp>
-        <p:nvSpPr>
-          <p:cNvPr id="4" name="TextBox 3"/>
-          <p:cNvSpPr txBox="1"/>
-          <p:nvPr/>
-        </p:nvSpPr>
-        <p:spPr>
-          <a:xfrm>
-            <a:off x="594360" y="3529584"/>
-            <a:ext cx="11002975" cy="685800"/>
-          </a:xfrm>
-          <a:prstGeom prst="rect">
-            <a:avLst/>
-          </a:prstGeom>
-          <a:noFill/>
-        </p:spPr>
-        <p:txBody>
-          <a:bodyPr wrap="square">
-            <a:spAutoFit/>
-          </a:bodyPr>
-          <a:lstStyle/>
-          <a:p>
-            <a:pPr algn="ctr"/>
-            <a:r>
-              <a:rPr sz="4400" b="1" i="0">
+              <a:rPr sz="4800" b="1" i="0">
                 <a:solidFill>
                   <a:srgbClr val="FFFFFF"/>
                 </a:solidFill>
                 <a:latin typeface="Arial"/>
               </a:rPr>
               <a:t>Deus por nós, quer nos abraçar</a:t>
-            </a:r>
-          </a:p>
-        </p:txBody>
-      </p:sp>
-      <p:sp>
-        <p:nvSpPr>
-          <p:cNvPr id="5" name="TextBox 4"/>
-          <p:cNvSpPr txBox="1"/>
-          <p:nvPr/>
-        </p:nvSpPr>
-        <p:spPr>
-          <a:xfrm>
-            <a:off x="594360" y="4251960"/>
-            <a:ext cx="11002975" cy="347472"/>
-          </a:xfrm>
-          <a:prstGeom prst="rect">
-            <a:avLst/>
-          </a:prstGeom>
-          <a:noFill/>
-        </p:spPr>
-        <p:txBody>
-          <a:bodyPr wrap="square">
-            <a:spAutoFit/>
-          </a:bodyPr>
-          <a:lstStyle/>
-          <a:p>
-            <a:pPr algn="ctr"/>
-            <a:r>
-              <a:rPr sz="2200" b="0" i="1">
-                <a:solidFill>
-                  <a:srgbClr val="8C8C8C"/>
-                </a:solidFill>
-                <a:latin typeface="Arial"/>
-              </a:rPr>
-              <a:t/>
             </a:r>
           </a:p>
         </p:txBody>
@@ -4948,8 +4388,8 @@
         </p:nvSpPr>
         <p:spPr>
           <a:xfrm>
-            <a:off x="594360" y="2258568"/>
-            <a:ext cx="11002975" cy="685800"/>
+            <a:off x="640080" y="2052828"/>
+            <a:ext cx="10911535" cy="731520"/>
           </a:xfrm>
           <a:prstGeom prst="rect">
             <a:avLst/>
@@ -4964,7 +4404,7 @@
           <a:p>
             <a:pPr algn="ctr"/>
             <a:r>
-              <a:rPr sz="4400" b="1" i="0">
+              <a:rPr sz="4800" b="1" i="0">
                 <a:solidFill>
                   <a:srgbClr val="FFFFFF"/>
                 </a:solidFill>
@@ -4983,8 +4423,8 @@
         </p:nvSpPr>
         <p:spPr>
           <a:xfrm>
-            <a:off x="594360" y="2980944"/>
-            <a:ext cx="11002975" cy="347472"/>
+            <a:off x="640080" y="2985516"/>
+            <a:ext cx="10911535" cy="731520"/>
           </a:xfrm>
           <a:prstGeom prst="rect">
             <a:avLst/>
@@ -4999,83 +4439,13 @@
           <a:p>
             <a:pPr algn="ctr"/>
             <a:r>
-              <a:rPr sz="2200" b="0" i="1">
-                <a:solidFill>
-                  <a:srgbClr val="8C8C8C"/>
-                </a:solidFill>
-                <a:latin typeface="Arial"/>
-              </a:rPr>
-              <a:t/>
-            </a:r>
-          </a:p>
-        </p:txBody>
-      </p:sp>
-      <p:sp>
-        <p:nvSpPr>
-          <p:cNvPr id="4" name="TextBox 3"/>
-          <p:cNvSpPr txBox="1"/>
-          <p:nvPr/>
-        </p:nvSpPr>
-        <p:spPr>
-          <a:xfrm>
-            <a:off x="594360" y="3529584"/>
-            <a:ext cx="11002975" cy="685800"/>
-          </a:xfrm>
-          <a:prstGeom prst="rect">
-            <a:avLst/>
-          </a:prstGeom>
-          <a:noFill/>
-        </p:spPr>
-        <p:txBody>
-          <a:bodyPr wrap="square">
-            <a:spAutoFit/>
-          </a:bodyPr>
-          <a:lstStyle/>
-          <a:p>
-            <a:pPr algn="ctr"/>
-            <a:r>
-              <a:rPr sz="4400" b="1" i="0">
+              <a:rPr sz="4800" b="1" i="0">
                 <a:solidFill>
                   <a:srgbClr val="FFFFFF"/>
                 </a:solidFill>
                 <a:latin typeface="Arial"/>
               </a:rPr>
               <a:t>Mais que pedimos</a:t>
-            </a:r>
-          </a:p>
-        </p:txBody>
-      </p:sp>
-      <p:sp>
-        <p:nvSpPr>
-          <p:cNvPr id="5" name="TextBox 4"/>
-          <p:cNvSpPr txBox="1"/>
-          <p:nvPr/>
-        </p:nvSpPr>
-        <p:spPr>
-          <a:xfrm>
-            <a:off x="594360" y="4251960"/>
-            <a:ext cx="11002975" cy="347472"/>
-          </a:xfrm>
-          <a:prstGeom prst="rect">
-            <a:avLst/>
-          </a:prstGeom>
-          <a:noFill/>
-        </p:spPr>
-        <p:txBody>
-          <a:bodyPr wrap="square">
-            <a:spAutoFit/>
-          </a:bodyPr>
-          <a:lstStyle/>
-          <a:p>
-            <a:pPr algn="ctr"/>
-            <a:r>
-              <a:rPr sz="2200" b="0" i="1">
-                <a:solidFill>
-                  <a:srgbClr val="8C8C8C"/>
-                </a:solidFill>
-                <a:latin typeface="Arial"/>
-              </a:rPr>
-              <a:t/>
             </a:r>
           </a:p>
         </p:txBody>
@@ -5114,8 +4484,8 @@
         </p:nvSpPr>
         <p:spPr>
           <a:xfrm>
-            <a:off x="594360" y="2894076"/>
-            <a:ext cx="11002975" cy="685800"/>
+            <a:off x="640080" y="2702052"/>
+            <a:ext cx="10911535" cy="731520"/>
           </a:xfrm>
           <a:prstGeom prst="rect">
             <a:avLst/>
@@ -5130,48 +4500,13 @@
           <a:p>
             <a:pPr algn="ctr"/>
             <a:r>
-              <a:rPr sz="4400" b="1" i="0">
+              <a:rPr sz="4800" b="1" i="0">
                 <a:solidFill>
                   <a:srgbClr val="FFFFFF"/>
                 </a:solidFill>
                 <a:latin typeface="Arial"/>
               </a:rPr>
               <a:t>Grandes coisas faz</a:t>
-            </a:r>
-          </a:p>
-        </p:txBody>
-      </p:sp>
-      <p:sp>
-        <p:nvSpPr>
-          <p:cNvPr id="3" name="TextBox 2"/>
-          <p:cNvSpPr txBox="1"/>
-          <p:nvPr/>
-        </p:nvSpPr>
-        <p:spPr>
-          <a:xfrm>
-            <a:off x="594360" y="3616452"/>
-            <a:ext cx="11002975" cy="347472"/>
-          </a:xfrm>
-          <a:prstGeom prst="rect">
-            <a:avLst/>
-          </a:prstGeom>
-          <a:noFill/>
-        </p:spPr>
-        <p:txBody>
-          <a:bodyPr wrap="square">
-            <a:spAutoFit/>
-          </a:bodyPr>
-          <a:lstStyle/>
-          <a:p>
-            <a:pPr algn="ctr"/>
-            <a:r>
-              <a:rPr sz="2200" b="0" i="1">
-                <a:solidFill>
-                  <a:srgbClr val="8C8C8C"/>
-                </a:solidFill>
-                <a:latin typeface="Arial"/>
-              </a:rPr>
-              <a:t/>
             </a:r>
           </a:p>
         </p:txBody>
@@ -5210,8 +4545,8 @@
         </p:nvSpPr>
         <p:spPr>
           <a:xfrm>
-            <a:off x="594360" y="2258568"/>
-            <a:ext cx="11002975" cy="685800"/>
+            <a:off x="640080" y="2052828"/>
+            <a:ext cx="10911535" cy="731520"/>
           </a:xfrm>
           <a:prstGeom prst="rect">
             <a:avLst/>
@@ -5226,7 +4561,7 @@
           <a:p>
             <a:pPr algn="ctr"/>
             <a:r>
-              <a:rPr sz="4400" b="1" i="0">
+              <a:rPr sz="4800" b="1" i="0">
                 <a:solidFill>
                   <a:srgbClr val="FFFFFF"/>
                 </a:solidFill>
@@ -5245,8 +4580,8 @@
         </p:nvSpPr>
         <p:spPr>
           <a:xfrm>
-            <a:off x="594360" y="2980944"/>
-            <a:ext cx="11002975" cy="347472"/>
+            <a:off x="640080" y="2985516"/>
+            <a:ext cx="10911535" cy="731520"/>
           </a:xfrm>
           <a:prstGeom prst="rect">
             <a:avLst/>
@@ -5261,83 +4596,13 @@
           <a:p>
             <a:pPr algn="ctr"/>
             <a:r>
-              <a:rPr sz="2200" b="0" i="1">
-                <a:solidFill>
-                  <a:srgbClr val="8C8C8C"/>
-                </a:solidFill>
-                <a:latin typeface="Arial"/>
-              </a:rPr>
-              <a:t/>
-            </a:r>
-          </a:p>
-        </p:txBody>
-      </p:sp>
-      <p:sp>
-        <p:nvSpPr>
-          <p:cNvPr id="4" name="TextBox 3"/>
-          <p:cNvSpPr txBox="1"/>
-          <p:nvPr/>
-        </p:nvSpPr>
-        <p:spPr>
-          <a:xfrm>
-            <a:off x="594360" y="3529584"/>
-            <a:ext cx="11002975" cy="685800"/>
-          </a:xfrm>
-          <a:prstGeom prst="rect">
-            <a:avLst/>
-          </a:prstGeom>
-          <a:noFill/>
-        </p:spPr>
-        <p:txBody>
-          <a:bodyPr wrap="square">
-            <a:spAutoFit/>
-          </a:bodyPr>
-          <a:lstStyle/>
-          <a:p>
-            <a:pPr algn="ctr"/>
-            <a:r>
-              <a:rPr sz="4400" b="1" i="0">
+              <a:rPr sz="4800" b="1" i="0">
                 <a:solidFill>
                   <a:srgbClr val="FFFFFF"/>
                 </a:solidFill>
                 <a:latin typeface="Arial"/>
               </a:rPr>
               <a:t>Nosso Deus é poderoso</a:t>
-            </a:r>
-          </a:p>
-        </p:txBody>
-      </p:sp>
-      <p:sp>
-        <p:nvSpPr>
-          <p:cNvPr id="5" name="TextBox 4"/>
-          <p:cNvSpPr txBox="1"/>
-          <p:nvPr/>
-        </p:nvSpPr>
-        <p:spPr>
-          <a:xfrm>
-            <a:off x="594360" y="4251960"/>
-            <a:ext cx="11002975" cy="347472"/>
-          </a:xfrm>
-          <a:prstGeom prst="rect">
-            <a:avLst/>
-          </a:prstGeom>
-          <a:noFill/>
-        </p:spPr>
-        <p:txBody>
-          <a:bodyPr wrap="square">
-            <a:spAutoFit/>
-          </a:bodyPr>
-          <a:lstStyle/>
-          <a:p>
-            <a:pPr algn="ctr"/>
-            <a:r>
-              <a:rPr sz="2200" b="0" i="1">
-                <a:solidFill>
-                  <a:srgbClr val="8C8C8C"/>
-                </a:solidFill>
-                <a:latin typeface="Arial"/>
-              </a:rPr>
-              <a:t/>
             </a:r>
           </a:p>
         </p:txBody>
@@ -5376,8 +4641,8 @@
         </p:nvSpPr>
         <p:spPr>
           <a:xfrm>
-            <a:off x="594360" y="2258568"/>
-            <a:ext cx="11002975" cy="685800"/>
+            <a:off x="640080" y="2052828"/>
+            <a:ext cx="10911535" cy="731520"/>
           </a:xfrm>
           <a:prstGeom prst="rect">
             <a:avLst/>
@@ -5392,7 +4657,7 @@
           <a:p>
             <a:pPr algn="ctr"/>
             <a:r>
-              <a:rPr sz="4400" b="1" i="0">
+              <a:rPr sz="4800" b="1" i="0">
                 <a:solidFill>
                   <a:srgbClr val="FFFFFF"/>
                 </a:solidFill>
@@ -5411,8 +4676,8 @@
         </p:nvSpPr>
         <p:spPr>
           <a:xfrm>
-            <a:off x="594360" y="2980944"/>
-            <a:ext cx="11002975" cy="347472"/>
+            <a:off x="640080" y="2985516"/>
+            <a:ext cx="10911535" cy="731520"/>
           </a:xfrm>
           <a:prstGeom prst="rect">
             <a:avLst/>
@@ -5427,83 +4692,13 @@
           <a:p>
             <a:pPr algn="ctr"/>
             <a:r>
-              <a:rPr sz="2200" b="0" i="1">
-                <a:solidFill>
-                  <a:srgbClr val="8C8C8C"/>
-                </a:solidFill>
-                <a:latin typeface="Arial"/>
-              </a:rPr>
-              <a:t/>
-            </a:r>
-          </a:p>
-        </p:txBody>
-      </p:sp>
-      <p:sp>
-        <p:nvSpPr>
-          <p:cNvPr id="4" name="TextBox 3"/>
-          <p:cNvSpPr txBox="1"/>
-          <p:nvPr/>
-        </p:nvSpPr>
-        <p:spPr>
-          <a:xfrm>
-            <a:off x="594360" y="3529584"/>
-            <a:ext cx="11002975" cy="685800"/>
-          </a:xfrm>
-          <a:prstGeom prst="rect">
-            <a:avLst/>
-          </a:prstGeom>
-          <a:noFill/>
-        </p:spPr>
-        <p:txBody>
-          <a:bodyPr wrap="square">
-            <a:spAutoFit/>
-          </a:bodyPr>
-          <a:lstStyle/>
-          <a:p>
-            <a:pPr algn="ctr"/>
-            <a:r>
-              <a:rPr sz="4400" b="1" i="0">
+              <a:rPr sz="4800" b="1" i="0">
                 <a:solidFill>
                   <a:srgbClr val="FFFFFF"/>
                 </a:solidFill>
                 <a:latin typeface="Arial"/>
               </a:rPr>
               <a:t>Nosso Deus é poderoso</a:t>
-            </a:r>
-          </a:p>
-        </p:txBody>
-      </p:sp>
-      <p:sp>
-        <p:nvSpPr>
-          <p:cNvPr id="5" name="TextBox 4"/>
-          <p:cNvSpPr txBox="1"/>
-          <p:nvPr/>
-        </p:nvSpPr>
-        <p:spPr>
-          <a:xfrm>
-            <a:off x="594360" y="4251960"/>
-            <a:ext cx="11002975" cy="347472"/>
-          </a:xfrm>
-          <a:prstGeom prst="rect">
-            <a:avLst/>
-          </a:prstGeom>
-          <a:noFill/>
-        </p:spPr>
-        <p:txBody>
-          <a:bodyPr wrap="square">
-            <a:spAutoFit/>
-          </a:bodyPr>
-          <a:lstStyle/>
-          <a:p>
-            <a:pPr algn="ctr"/>
-            <a:r>
-              <a:rPr sz="2200" b="0" i="1">
-                <a:solidFill>
-                  <a:srgbClr val="8C8C8C"/>
-                </a:solidFill>
-                <a:latin typeface="Arial"/>
-              </a:rPr>
-              <a:t/>
             </a:r>
           </a:p>
         </p:txBody>
@@ -5542,8 +4737,8 @@
         </p:nvSpPr>
         <p:spPr>
           <a:xfrm>
-            <a:off x="594360" y="2258568"/>
-            <a:ext cx="11002975" cy="685800"/>
+            <a:off x="640080" y="2052828"/>
+            <a:ext cx="10911535" cy="731520"/>
           </a:xfrm>
           <a:prstGeom prst="rect">
             <a:avLst/>
@@ -5558,7 +4753,7 @@
           <a:p>
             <a:pPr algn="ctr"/>
             <a:r>
-              <a:rPr sz="4400" b="1" i="0">
+              <a:rPr sz="4800" b="1" i="0">
                 <a:solidFill>
                   <a:srgbClr val="FFFFFF"/>
                 </a:solidFill>
@@ -5577,8 +4772,8 @@
         </p:nvSpPr>
         <p:spPr>
           <a:xfrm>
-            <a:off x="594360" y="2980944"/>
-            <a:ext cx="11002975" cy="347472"/>
+            <a:off x="640080" y="2985516"/>
+            <a:ext cx="10911535" cy="731520"/>
           </a:xfrm>
           <a:prstGeom prst="rect">
             <a:avLst/>
@@ -5593,83 +4788,13 @@
           <a:p>
             <a:pPr algn="ctr"/>
             <a:r>
-              <a:rPr sz="2200" b="0" i="1">
-                <a:solidFill>
-                  <a:srgbClr val="8C8C8C"/>
-                </a:solidFill>
-                <a:latin typeface="Arial"/>
-              </a:rPr>
-              <a:t/>
-            </a:r>
-          </a:p>
-        </p:txBody>
-      </p:sp>
-      <p:sp>
-        <p:nvSpPr>
-          <p:cNvPr id="4" name="TextBox 3"/>
-          <p:cNvSpPr txBox="1"/>
-          <p:nvPr/>
-        </p:nvSpPr>
-        <p:spPr>
-          <a:xfrm>
-            <a:off x="594360" y="3529584"/>
-            <a:ext cx="11002975" cy="685800"/>
-          </a:xfrm>
-          <a:prstGeom prst="rect">
-            <a:avLst/>
-          </a:prstGeom>
-          <a:noFill/>
-        </p:spPr>
-        <p:txBody>
-          <a:bodyPr wrap="square">
-            <a:spAutoFit/>
-          </a:bodyPr>
-          <a:lstStyle/>
-          <a:p>
-            <a:pPr algn="ctr"/>
-            <a:r>
-              <a:rPr sz="4400" b="1" i="0">
+              <a:rPr sz="4800" b="1" i="0">
                 <a:solidFill>
                   <a:srgbClr val="FFFFFF"/>
                 </a:solidFill>
                 <a:latin typeface="Arial"/>
               </a:rPr>
               <a:t>Em seu nome vamos vencer</a:t>
-            </a:r>
-          </a:p>
-        </p:txBody>
-      </p:sp>
-      <p:sp>
-        <p:nvSpPr>
-          <p:cNvPr id="5" name="TextBox 4"/>
-          <p:cNvSpPr txBox="1"/>
-          <p:nvPr/>
-        </p:nvSpPr>
-        <p:spPr>
-          <a:xfrm>
-            <a:off x="594360" y="4251960"/>
-            <a:ext cx="11002975" cy="347472"/>
-          </a:xfrm>
-          <a:prstGeom prst="rect">
-            <a:avLst/>
-          </a:prstGeom>
-          <a:noFill/>
-        </p:spPr>
-        <p:txBody>
-          <a:bodyPr wrap="square">
-            <a:spAutoFit/>
-          </a:bodyPr>
-          <a:lstStyle/>
-          <a:p>
-            <a:pPr algn="ctr"/>
-            <a:r>
-              <a:rPr sz="2200" b="0" i="1">
-                <a:solidFill>
-                  <a:srgbClr val="8C8C8C"/>
-                </a:solidFill>
-                <a:latin typeface="Arial"/>
-              </a:rPr>
-              <a:t/>
             </a:r>
           </a:p>
         </p:txBody>
@@ -5708,8 +4833,8 @@
         </p:nvSpPr>
         <p:spPr>
           <a:xfrm>
-            <a:off x="594360" y="2258568"/>
-            <a:ext cx="11002975" cy="685800"/>
+            <a:off x="640080" y="2052828"/>
+            <a:ext cx="10911535" cy="731520"/>
           </a:xfrm>
           <a:prstGeom prst="rect">
             <a:avLst/>
@@ -5724,7 +4849,7 @@
           <a:p>
             <a:pPr algn="ctr"/>
             <a:r>
-              <a:rPr sz="4400" b="1" i="0">
+              <a:rPr sz="4800" b="1" i="0">
                 <a:solidFill>
                   <a:srgbClr val="FFFFFF"/>
                 </a:solidFill>
@@ -5743,8 +4868,8 @@
         </p:nvSpPr>
         <p:spPr>
           <a:xfrm>
-            <a:off x="594360" y="2980944"/>
-            <a:ext cx="11002975" cy="347472"/>
+            <a:off x="640080" y="2985516"/>
+            <a:ext cx="10911535" cy="731520"/>
           </a:xfrm>
           <a:prstGeom prst="rect">
             <a:avLst/>
@@ -5759,83 +4884,13 @@
           <a:p>
             <a:pPr algn="ctr"/>
             <a:r>
-              <a:rPr sz="2200" b="0" i="1">
-                <a:solidFill>
-                  <a:srgbClr val="8C8C8C"/>
-                </a:solidFill>
-                <a:latin typeface="Arial"/>
-              </a:rPr>
-              <a:t/>
-            </a:r>
-          </a:p>
-        </p:txBody>
-      </p:sp>
-      <p:sp>
-        <p:nvSpPr>
-          <p:cNvPr id="4" name="TextBox 3"/>
-          <p:cNvSpPr txBox="1"/>
-          <p:nvPr/>
-        </p:nvSpPr>
-        <p:spPr>
-          <a:xfrm>
-            <a:off x="594360" y="3529584"/>
-            <a:ext cx="11002975" cy="685800"/>
-          </a:xfrm>
-          <a:prstGeom prst="rect">
-            <a:avLst/>
-          </a:prstGeom>
-          <a:noFill/>
-        </p:spPr>
-        <p:txBody>
-          <a:bodyPr wrap="square">
-            <a:spAutoFit/>
-          </a:bodyPr>
-          <a:lstStyle/>
-          <a:p>
-            <a:pPr algn="ctr"/>
-            <a:r>
-              <a:rPr sz="4400" b="1" i="0">
+              <a:rPr sz="4800" b="1" i="0">
                 <a:solidFill>
                   <a:srgbClr val="FFFFFF"/>
                 </a:solidFill>
                 <a:latin typeface="Arial"/>
               </a:rPr>
               <a:t>Deus conosco, nos conduzirá</a:t>
-            </a:r>
-          </a:p>
-        </p:txBody>
-      </p:sp>
-      <p:sp>
-        <p:nvSpPr>
-          <p:cNvPr id="5" name="TextBox 4"/>
-          <p:cNvSpPr txBox="1"/>
-          <p:nvPr/>
-        </p:nvSpPr>
-        <p:spPr>
-          <a:xfrm>
-            <a:off x="594360" y="4251960"/>
-            <a:ext cx="11002975" cy="347472"/>
-          </a:xfrm>
-          <a:prstGeom prst="rect">
-            <a:avLst/>
-          </a:prstGeom>
-          <a:noFill/>
-        </p:spPr>
-        <p:txBody>
-          <a:bodyPr wrap="square">
-            <a:spAutoFit/>
-          </a:bodyPr>
-          <a:lstStyle/>
-          <a:p>
-            <a:pPr algn="ctr"/>
-            <a:r>
-              <a:rPr sz="2200" b="0" i="1">
-                <a:solidFill>
-                  <a:srgbClr val="8C8C8C"/>
-                </a:solidFill>
-                <a:latin typeface="Arial"/>
-              </a:rPr>
-              <a:t/>
             </a:r>
           </a:p>
         </p:txBody>
@@ -5874,8 +4929,8 @@
         </p:nvSpPr>
         <p:spPr>
           <a:xfrm>
-            <a:off x="594360" y="2258568"/>
-            <a:ext cx="11002975" cy="685800"/>
+            <a:off x="640080" y="2052828"/>
+            <a:ext cx="10911535" cy="731520"/>
           </a:xfrm>
           <a:prstGeom prst="rect">
             <a:avLst/>
@@ -5890,7 +4945,7 @@
           <a:p>
             <a:pPr algn="ctr"/>
             <a:r>
-              <a:rPr sz="4400" b="1" i="0">
+              <a:rPr sz="4800" b="1" i="0">
                 <a:solidFill>
                   <a:srgbClr val="FFFFFF"/>
                 </a:solidFill>
@@ -5909,8 +4964,8 @@
         </p:nvSpPr>
         <p:spPr>
           <a:xfrm>
-            <a:off x="594360" y="2980944"/>
-            <a:ext cx="11002975" cy="347472"/>
+            <a:off x="640080" y="2985516"/>
+            <a:ext cx="10911535" cy="731520"/>
           </a:xfrm>
           <a:prstGeom prst="rect">
             <a:avLst/>
@@ -5925,83 +4980,13 @@
           <a:p>
             <a:pPr algn="ctr"/>
             <a:r>
-              <a:rPr sz="2200" b="0" i="1">
-                <a:solidFill>
-                  <a:srgbClr val="8C8C8C"/>
-                </a:solidFill>
-                <a:latin typeface="Arial"/>
-              </a:rPr>
-              <a:t/>
-            </a:r>
-          </a:p>
-        </p:txBody>
-      </p:sp>
-      <p:sp>
-        <p:nvSpPr>
-          <p:cNvPr id="4" name="TextBox 3"/>
-          <p:cNvSpPr txBox="1"/>
-          <p:nvPr/>
-        </p:nvSpPr>
-        <p:spPr>
-          <a:xfrm>
-            <a:off x="594360" y="3529584"/>
-            <a:ext cx="11002975" cy="685800"/>
-          </a:xfrm>
-          <a:prstGeom prst="rect">
-            <a:avLst/>
-          </a:prstGeom>
-          <a:noFill/>
-        </p:spPr>
-        <p:txBody>
-          <a:bodyPr wrap="square">
-            <a:spAutoFit/>
-          </a:bodyPr>
-          <a:lstStyle/>
-          <a:p>
-            <a:pPr algn="ctr"/>
-            <a:r>
-              <a:rPr sz="4400" b="1" i="0">
+              <a:rPr sz="4800" b="1" i="0">
                 <a:solidFill>
                   <a:srgbClr val="FFFFFF"/>
                 </a:solidFill>
                 <a:latin typeface="Arial"/>
               </a:rPr>
               <a:t>Deus por nós, quer nos abraçar</a:t>
-            </a:r>
-          </a:p>
-        </p:txBody>
-      </p:sp>
-      <p:sp>
-        <p:nvSpPr>
-          <p:cNvPr id="5" name="TextBox 4"/>
-          <p:cNvSpPr txBox="1"/>
-          <p:nvPr/>
-        </p:nvSpPr>
-        <p:spPr>
-          <a:xfrm>
-            <a:off x="594360" y="4251960"/>
-            <a:ext cx="11002975" cy="347472"/>
-          </a:xfrm>
-          <a:prstGeom prst="rect">
-            <a:avLst/>
-          </a:prstGeom>
-          <a:noFill/>
-        </p:spPr>
-        <p:txBody>
-          <a:bodyPr wrap="square">
-            <a:spAutoFit/>
-          </a:bodyPr>
-          <a:lstStyle/>
-          <a:p>
-            <a:pPr algn="ctr"/>
-            <a:r>
-              <a:rPr sz="2200" b="0" i="1">
-                <a:solidFill>
-                  <a:srgbClr val="8C8C8C"/>
-                </a:solidFill>
-                <a:latin typeface="Arial"/>
-              </a:rPr>
-              <a:t/>
             </a:r>
           </a:p>
         </p:txBody>
@@ -6040,8 +5025,8 @@
         </p:nvSpPr>
         <p:spPr>
           <a:xfrm>
-            <a:off x="594360" y="1837944"/>
-            <a:ext cx="11002975" cy="685800"/>
+            <a:off x="640080" y="1650492"/>
+            <a:ext cx="10911535" cy="731520"/>
           </a:xfrm>
           <a:prstGeom prst="rect">
             <a:avLst/>
@@ -6056,7 +5041,7 @@
           <a:p>
             <a:pPr algn="ctr"/>
             <a:r>
-              <a:rPr sz="4400" b="1" i="0">
+              <a:rPr sz="4800" b="1" i="0">
                 <a:solidFill>
                   <a:srgbClr val="FFFFFF"/>
                 </a:solidFill>
@@ -6075,8 +5060,8 @@
         </p:nvSpPr>
         <p:spPr>
           <a:xfrm>
-            <a:off x="594360" y="2560320"/>
-            <a:ext cx="11002975" cy="384048"/>
+            <a:off x="640080" y="2418588"/>
+            <a:ext cx="10911535" cy="365760"/>
           </a:xfrm>
           <a:prstGeom prst="rect">
             <a:avLst/>
@@ -6091,9 +5076,9 @@
           <a:p>
             <a:pPr algn="ctr"/>
             <a:r>
-              <a:rPr sz="2344" b="0" i="1">
-                <a:solidFill>
-                  <a:srgbClr val="B4B4B4"/>
+              <a:rPr sz="2400" b="0" i="1">
+                <a:solidFill>
+                  <a:srgbClr val="AAAAAA"/>
                 </a:solidFill>
                 <a:latin typeface="Arial"/>
               </a:rPr>
@@ -6110,8 +5095,8 @@
         </p:nvSpPr>
         <p:spPr>
           <a:xfrm>
-            <a:off x="594360" y="2980944"/>
-            <a:ext cx="11002975" cy="347472"/>
+            <a:off x="640080" y="2985516"/>
+            <a:ext cx="10911535" cy="731520"/>
           </a:xfrm>
           <a:prstGeom prst="rect">
             <a:avLst/>
@@ -6126,13 +5111,13 @@
           <a:p>
             <a:pPr algn="ctr"/>
             <a:r>
-              <a:rPr sz="2000" b="0" i="1">
-                <a:solidFill>
-                  <a:srgbClr val="8C8C8C"/>
+              <a:rPr sz="4800" b="1" i="0">
+                <a:solidFill>
+                  <a:srgbClr val="FFFFFF"/>
                 </a:solidFill>
                 <a:latin typeface="Arial"/>
               </a:rPr>
-              <a:t/>
+              <a:t>思いも希望も はるかに超えて</a:t>
             </a:r>
           </a:p>
         </p:txBody>
@@ -6145,8 +5130,8 @@
         </p:nvSpPr>
         <p:spPr>
           <a:xfrm>
-            <a:off x="594360" y="3529584"/>
-            <a:ext cx="11002975" cy="685800"/>
+            <a:off x="640080" y="3753612"/>
+            <a:ext cx="10911535" cy="365760"/>
           </a:xfrm>
           <a:prstGeom prst="rect">
             <a:avLst/>
@@ -6161,13 +5146,13 @@
           <a:p>
             <a:pPr algn="ctr"/>
             <a:r>
-              <a:rPr sz="4400" b="1" i="0">
-                <a:solidFill>
-                  <a:srgbClr val="FFFFFF"/>
+              <a:rPr sz="2400" b="0" i="1">
+                <a:solidFill>
+                  <a:srgbClr val="AAAAAA"/>
                 </a:solidFill>
                 <a:latin typeface="Arial"/>
               </a:rPr>
-              <a:t>思いも希望も はるかに超えて</a:t>
+              <a:t>omoimo kibou mo haruka ni koete</a:t>
             </a:r>
           </a:p>
         </p:txBody>
@@ -6180,8 +5165,8 @@
         </p:nvSpPr>
         <p:spPr>
           <a:xfrm>
-            <a:off x="594360" y="4251960"/>
-            <a:ext cx="11002975" cy="384048"/>
+            <a:off x="640080" y="4530852"/>
+            <a:ext cx="10911535" cy="310896"/>
           </a:xfrm>
           <a:prstGeom prst="rect">
             <a:avLst/>
@@ -6196,13 +5181,13 @@
           <a:p>
             <a:pPr algn="ctr"/>
             <a:r>
-              <a:rPr sz="2400" b="0" i="1">
-                <a:solidFill>
-                  <a:srgbClr val="B4B4B4"/>
+              <a:rPr sz="2000" b="0" i="1">
+                <a:solidFill>
+                  <a:srgbClr val="828282"/>
                 </a:solidFill>
                 <a:latin typeface="Arial"/>
               </a:rPr>
-              <a:t>omoimo kibou mo haruka ni koete</a:t>
+              <a:t>Poderoso, nunca falhará</a:t>
             </a:r>
           </a:p>
         </p:txBody>
@@ -6215,8 +5200,8 @@
         </p:nvSpPr>
         <p:spPr>
           <a:xfrm>
-            <a:off x="594360" y="4672584"/>
-            <a:ext cx="11002975" cy="347472"/>
+            <a:off x="640080" y="4896612"/>
+            <a:ext cx="10911535" cy="310896"/>
           </a:xfrm>
           <a:prstGeom prst="rect">
             <a:avLst/>
@@ -6233,11 +5218,11 @@
             <a:r>
               <a:rPr sz="2000" b="0" i="1">
                 <a:solidFill>
-                  <a:srgbClr val="8C8C8C"/>
+                  <a:srgbClr val="828282"/>
                 </a:solidFill>
                 <a:latin typeface="Arial"/>
               </a:rPr>
-              <a:t/>
+              <a:t>Maravilhoso Deus</a:t>
             </a:r>
           </a:p>
         </p:txBody>

--- a/output_pptx/God_Is_Able.pptx
+++ b/output_pptx/God_Is_Able.pptx
@@ -3184,6 +3184,76 @@
           </a:p>
         </p:txBody>
       </p:sp>
+      <p:sp>
+        <p:nvSpPr>
+          <p:cNvPr id="4" name="TextBox 3"/>
+          <p:cNvSpPr txBox="1"/>
+          <p:nvPr/>
+        </p:nvSpPr>
+        <p:spPr>
+          <a:xfrm>
+            <a:off x="640080" y="4128516"/>
+            <a:ext cx="10911535" cy="310896"/>
+          </a:xfrm>
+          <a:prstGeom prst="rect">
+            <a:avLst/>
+          </a:prstGeom>
+          <a:noFill/>
+        </p:spPr>
+        <p:txBody>
+          <a:bodyPr wrap="square">
+            <a:spAutoFit/>
+          </a:bodyPr>
+          <a:lstStyle/>
+          <a:p>
+            <a:pPr algn="ctr"/>
+            <a:r>
+              <a:rPr sz="2000" b="0" i="0">
+                <a:solidFill>
+                  <a:srgbClr val="828282"/>
+                </a:solidFill>
+                <a:latin typeface="Arial"/>
+              </a:rPr>
+              <a:t>力強き方、決してお失いにならず</a:t>
+            </a:r>
+          </a:p>
+        </p:txBody>
+      </p:sp>
+      <p:sp>
+        <p:nvSpPr>
+          <p:cNvPr id="5" name="TextBox 4"/>
+          <p:cNvSpPr txBox="1"/>
+          <p:nvPr/>
+        </p:nvSpPr>
+        <p:spPr>
+          <a:xfrm>
+            <a:off x="640080" y="4494276"/>
+            <a:ext cx="10911535" cy="310896"/>
+          </a:xfrm>
+          <a:prstGeom prst="rect">
+            <a:avLst/>
+          </a:prstGeom>
+          <a:noFill/>
+        </p:spPr>
+        <p:txBody>
+          <a:bodyPr wrap="square">
+            <a:spAutoFit/>
+          </a:bodyPr>
+          <a:lstStyle/>
+          <a:p>
+            <a:pPr algn="ctr"/>
+            <a:r>
+              <a:rPr sz="2000" b="0" i="0">
+                <a:solidFill>
+                  <a:srgbClr val="828282"/>
+                </a:solidFill>
+                <a:latin typeface="Arial"/>
+              </a:rPr>
+              <a:t>驚くべき神よ</a:t>
+            </a:r>
+          </a:p>
+        </p:txBody>
+      </p:sp>
     </p:spTree>
   </p:cSld>
   <p:clrMapOvr>
@@ -3411,6 +3481,76 @@
           </a:p>
         </p:txBody>
       </p:sp>
+      <p:sp>
+        <p:nvSpPr>
+          <p:cNvPr id="4" name="TextBox 3"/>
+          <p:cNvSpPr txBox="1"/>
+          <p:nvPr/>
+        </p:nvSpPr>
+        <p:spPr>
+          <a:xfrm>
+            <a:off x="640080" y="4128516"/>
+            <a:ext cx="10911535" cy="310896"/>
+          </a:xfrm>
+          <a:prstGeom prst="rect">
+            <a:avLst/>
+          </a:prstGeom>
+          <a:noFill/>
+        </p:spPr>
+        <p:txBody>
+          <a:bodyPr wrap="square">
+            <a:spAutoFit/>
+          </a:bodyPr>
+          <a:lstStyle/>
+          <a:p>
+            <a:pPr algn="ctr"/>
+            <a:r>
+              <a:rPr sz="2000" b="0" i="0">
+                <a:solidFill>
+                  <a:srgbClr val="828282"/>
+                </a:solidFill>
+                <a:latin typeface="Arial"/>
+              </a:rPr>
+              <a:t>解決をお与えになる</a:t>
+            </a:r>
+          </a:p>
+        </p:txBody>
+      </p:sp>
+      <p:sp>
+        <p:nvSpPr>
+          <p:cNvPr id="5" name="TextBox 4"/>
+          <p:cNvSpPr txBox="1"/>
+          <p:nvPr/>
+        </p:nvSpPr>
+        <p:spPr>
+          <a:xfrm>
+            <a:off x="640080" y="4494276"/>
+            <a:ext cx="10911535" cy="310896"/>
+          </a:xfrm>
+          <a:prstGeom prst="rect">
+            <a:avLst/>
+          </a:prstGeom>
+          <a:noFill/>
+        </p:spPr>
+        <p:txBody>
+          <a:bodyPr wrap="square">
+            <a:spAutoFit/>
+          </a:bodyPr>
+          <a:lstStyle/>
+          <a:p>
+            <a:pPr algn="ctr"/>
+            <a:r>
+              <a:rPr sz="2000" b="0" i="0">
+                <a:solidFill>
+                  <a:srgbClr val="828282"/>
+                </a:solidFill>
+                <a:latin typeface="Arial"/>
+              </a:rPr>
+              <a:t>私たちが知る以上に</a:t>
+            </a:r>
+          </a:p>
+        </p:txBody>
+      </p:sp>
     </p:spTree>
   </p:cSld>
   <p:clrMapOvr>
@@ -3507,6 +3647,76 @@
           </a:p>
         </p:txBody>
       </p:sp>
+      <p:sp>
+        <p:nvSpPr>
+          <p:cNvPr id="4" name="TextBox 3"/>
+          <p:cNvSpPr txBox="1"/>
+          <p:nvPr/>
+        </p:nvSpPr>
+        <p:spPr>
+          <a:xfrm>
+            <a:off x="640080" y="4128516"/>
+            <a:ext cx="10911535" cy="310896"/>
+          </a:xfrm>
+          <a:prstGeom prst="rect">
+            <a:avLst/>
+          </a:prstGeom>
+          <a:noFill/>
+        </p:spPr>
+        <p:txBody>
+          <a:bodyPr wrap="square">
+            <a:spAutoFit/>
+          </a:bodyPr>
+          <a:lstStyle/>
+          <a:p>
+            <a:pPr algn="ctr"/>
+            <a:r>
+              <a:rPr sz="2000" b="0" i="0">
+                <a:solidFill>
+                  <a:srgbClr val="828282"/>
+                </a:solidFill>
+                <a:latin typeface="Arial"/>
+              </a:rPr>
+              <a:t>私たちが望む以上に</a:t>
+            </a:r>
+          </a:p>
+        </p:txBody>
+      </p:sp>
+      <p:sp>
+        <p:nvSpPr>
+          <p:cNvPr id="5" name="TextBox 4"/>
+          <p:cNvSpPr txBox="1"/>
+          <p:nvPr/>
+        </p:nvSpPr>
+        <p:spPr>
+          <a:xfrm>
+            <a:off x="640080" y="4494276"/>
+            <a:ext cx="10911535" cy="310896"/>
+          </a:xfrm>
+          <a:prstGeom prst="rect">
+            <a:avLst/>
+          </a:prstGeom>
+          <a:noFill/>
+        </p:spPr>
+        <p:txBody>
+          <a:bodyPr wrap="square">
+            <a:spAutoFit/>
+          </a:bodyPr>
+          <a:lstStyle/>
+          <a:p>
+            <a:pPr algn="ctr"/>
+            <a:r>
+              <a:rPr sz="2000" b="0" i="0">
+                <a:solidFill>
+                  <a:srgbClr val="828282"/>
+                </a:solidFill>
+                <a:latin typeface="Arial"/>
+              </a:rPr>
+              <a:t>大いなる業をなさる</a:t>
+            </a:r>
+          </a:p>
+        </p:txBody>
+      </p:sp>
     </p:spTree>
   </p:cSld>
   <p:clrMapOvr>
@@ -3970,6 +4180,76 @@
           </a:p>
         </p:txBody>
       </p:sp>
+      <p:sp>
+        <p:nvSpPr>
+          <p:cNvPr id="4" name="TextBox 3"/>
+          <p:cNvSpPr txBox="1"/>
+          <p:nvPr/>
+        </p:nvSpPr>
+        <p:spPr>
+          <a:xfrm>
+            <a:off x="640080" y="4128516"/>
+            <a:ext cx="10911535" cy="310896"/>
+          </a:xfrm>
+          <a:prstGeom prst="rect">
+            <a:avLst/>
+          </a:prstGeom>
+          <a:noFill/>
+        </p:spPr>
+        <p:txBody>
+          <a:bodyPr wrap="square">
+            <a:spAutoFit/>
+          </a:bodyPr>
+          <a:lstStyle/>
+          <a:p>
+            <a:pPr algn="ctr"/>
+            <a:r>
+              <a:rPr sz="2000" b="0" i="0">
+                <a:solidFill>
+                  <a:srgbClr val="828282"/>
+                </a:solidFill>
+                <a:latin typeface="Arial"/>
+              </a:rPr>
+              <a:t>よみがえり、死に勝利された</a:t>
+            </a:r>
+          </a:p>
+        </p:txBody>
+      </p:sp>
+      <p:sp>
+        <p:nvSpPr>
+          <p:cNvPr id="5" name="TextBox 4"/>
+          <p:cNvSpPr txBox="1"/>
+          <p:nvPr/>
+        </p:nvSpPr>
+        <p:spPr>
+          <a:xfrm>
+            <a:off x="640080" y="4494276"/>
+            <a:ext cx="10911535" cy="310896"/>
+          </a:xfrm>
+          <a:prstGeom prst="rect">
+            <a:avLst/>
+          </a:prstGeom>
+          <a:noFill/>
+        </p:spPr>
+        <p:txBody>
+          <a:bodyPr wrap="square">
+            <a:spAutoFit/>
+          </a:bodyPr>
+          <a:lstStyle/>
+          <a:p>
+            <a:pPr algn="ctr"/>
+            <a:r>
+              <a:rPr sz="2000" b="0" i="0">
+                <a:solidFill>
+                  <a:srgbClr val="828282"/>
+                </a:solidFill>
+                <a:latin typeface="Arial"/>
+              </a:rPr>
+              <a:t>私たちの神は力強い</a:t>
+            </a:r>
+          </a:p>
+        </p:txBody>
+      </p:sp>
     </p:spTree>
   </p:cSld>
   <p:clrMapOvr>
@@ -4066,6 +4346,76 @@
           </a:p>
         </p:txBody>
       </p:sp>
+      <p:sp>
+        <p:nvSpPr>
+          <p:cNvPr id="4" name="TextBox 3"/>
+          <p:cNvSpPr txBox="1"/>
+          <p:nvPr/>
+        </p:nvSpPr>
+        <p:spPr>
+          <a:xfrm>
+            <a:off x="640080" y="4128516"/>
+            <a:ext cx="10911535" cy="310896"/>
+          </a:xfrm>
+          <a:prstGeom prst="rect">
+            <a:avLst/>
+          </a:prstGeom>
+          <a:noFill/>
+        </p:spPr>
+        <p:txBody>
+          <a:bodyPr wrap="square">
+            <a:spAutoFit/>
+          </a:bodyPr>
+          <a:lstStyle/>
+          <a:p>
+            <a:pPr algn="ctr"/>
+            <a:r>
+              <a:rPr sz="2000" b="0" i="0">
+                <a:solidFill>
+                  <a:srgbClr val="828282"/>
+                </a:solidFill>
+                <a:latin typeface="Arial"/>
+              </a:rPr>
+              <a:t>み名によって私たちは勝利する</a:t>
+            </a:r>
+          </a:p>
+        </p:txBody>
+      </p:sp>
+      <p:sp>
+        <p:nvSpPr>
+          <p:cNvPr id="5" name="TextBox 4"/>
+          <p:cNvSpPr txBox="1"/>
+          <p:nvPr/>
+        </p:nvSpPr>
+        <p:spPr>
+          <a:xfrm>
+            <a:off x="640080" y="4494276"/>
+            <a:ext cx="10911535" cy="310896"/>
+          </a:xfrm>
+          <a:prstGeom prst="rect">
+            <a:avLst/>
+          </a:prstGeom>
+          <a:noFill/>
+        </p:spPr>
+        <p:txBody>
+          <a:bodyPr wrap="square">
+            <a:spAutoFit/>
+          </a:bodyPr>
+          <a:lstStyle/>
+          <a:p>
+            <a:pPr algn="ctr"/>
+            <a:r>
+              <a:rPr sz="2000" b="0" i="0">
+                <a:solidFill>
+                  <a:srgbClr val="828282"/>
+                </a:solidFill>
+                <a:latin typeface="Arial"/>
+              </a:rPr>
+              <a:t>私たちの神は力強い</a:t>
+            </a:r>
+          </a:p>
+        </p:txBody>
+      </p:sp>
     </p:spTree>
   </p:cSld>
   <p:clrMapOvr>
@@ -4162,6 +4512,76 @@
           </a:p>
         </p:txBody>
       </p:sp>
+      <p:sp>
+        <p:nvSpPr>
+          <p:cNvPr id="4" name="TextBox 3"/>
+          <p:cNvSpPr txBox="1"/>
+          <p:nvPr/>
+        </p:nvSpPr>
+        <p:spPr>
+          <a:xfrm>
+            <a:off x="640080" y="4128516"/>
+            <a:ext cx="10911535" cy="310896"/>
+          </a:xfrm>
+          <a:prstGeom prst="rect">
+            <a:avLst/>
+          </a:prstGeom>
+          <a:noFill/>
+        </p:spPr>
+        <p:txBody>
+          <a:bodyPr wrap="square">
+            <a:spAutoFit/>
+          </a:bodyPr>
+          <a:lstStyle/>
+          <a:p>
+            <a:pPr algn="ctr"/>
+            <a:r>
+              <a:rPr sz="2000" b="0" i="0">
+                <a:solidFill>
+                  <a:srgbClr val="828282"/>
+                </a:solidFill>
+                <a:latin typeface="Arial"/>
+              </a:rPr>
+              <a:t>私たちの神は力強い</a:t>
+            </a:r>
+          </a:p>
+        </p:txBody>
+      </p:sp>
+      <p:sp>
+        <p:nvSpPr>
+          <p:cNvPr id="5" name="TextBox 4"/>
+          <p:cNvSpPr txBox="1"/>
+          <p:nvPr/>
+        </p:nvSpPr>
+        <p:spPr>
+          <a:xfrm>
+            <a:off x="640080" y="4494276"/>
+            <a:ext cx="10911535" cy="310896"/>
+          </a:xfrm>
+          <a:prstGeom prst="rect">
+            <a:avLst/>
+          </a:prstGeom>
+          <a:noFill/>
+        </p:spPr>
+        <p:txBody>
+          <a:bodyPr wrap="square">
+            <a:spAutoFit/>
+          </a:bodyPr>
+          <a:lstStyle/>
+          <a:p>
+            <a:pPr algn="ctr"/>
+            <a:r>
+              <a:rPr sz="2000" b="0" i="0">
+                <a:solidFill>
+                  <a:srgbClr val="828282"/>
+                </a:solidFill>
+                <a:latin typeface="Arial"/>
+              </a:rPr>
+              <a:t>み名によって私たちは勝利する</a:t>
+            </a:r>
+          </a:p>
+        </p:txBody>
+      </p:sp>
     </p:spTree>
   </p:cSld>
   <p:clrMapOvr>
@@ -4258,6 +4678,76 @@
           </a:p>
         </p:txBody>
       </p:sp>
+      <p:sp>
+        <p:nvSpPr>
+          <p:cNvPr id="4" name="TextBox 3"/>
+          <p:cNvSpPr txBox="1"/>
+          <p:nvPr/>
+        </p:nvSpPr>
+        <p:spPr>
+          <a:xfrm>
+            <a:off x="640080" y="4128516"/>
+            <a:ext cx="10911535" cy="310896"/>
+          </a:xfrm>
+          <a:prstGeom prst="rect">
+            <a:avLst/>
+          </a:prstGeom>
+          <a:noFill/>
+        </p:spPr>
+        <p:txBody>
+          <a:bodyPr wrap="square">
+            <a:spAutoFit/>
+          </a:bodyPr>
+          <a:lstStyle/>
+          <a:p>
+            <a:pPr algn="ctr"/>
+            <a:r>
+              <a:rPr sz="2000" b="0" i="0">
+                <a:solidFill>
+                  <a:srgbClr val="828282"/>
+                </a:solidFill>
+                <a:latin typeface="Arial"/>
+              </a:rPr>
+              <a:t>私たちの神は力強い</a:t>
+            </a:r>
+          </a:p>
+        </p:txBody>
+      </p:sp>
+      <p:sp>
+        <p:nvSpPr>
+          <p:cNvPr id="5" name="TextBox 4"/>
+          <p:cNvSpPr txBox="1"/>
+          <p:nvPr/>
+        </p:nvSpPr>
+        <p:spPr>
+          <a:xfrm>
+            <a:off x="640080" y="4494276"/>
+            <a:ext cx="10911535" cy="310896"/>
+          </a:xfrm>
+          <a:prstGeom prst="rect">
+            <a:avLst/>
+          </a:prstGeom>
+          <a:noFill/>
+        </p:spPr>
+        <p:txBody>
+          <a:bodyPr wrap="square">
+            <a:spAutoFit/>
+          </a:bodyPr>
+          <a:lstStyle/>
+          <a:p>
+            <a:pPr algn="ctr"/>
+            <a:r>
+              <a:rPr sz="2000" b="0" i="0">
+                <a:solidFill>
+                  <a:srgbClr val="828282"/>
+                </a:solidFill>
+                <a:latin typeface="Arial"/>
+              </a:rPr>
+              <a:t>神は私たちとともに、導いてくださる</a:t>
+            </a:r>
+          </a:p>
+        </p:txBody>
+      </p:sp>
     </p:spTree>
   </p:cSld>
   <p:clrMapOvr>
@@ -4354,6 +4844,76 @@
           </a:p>
         </p:txBody>
       </p:sp>
+      <p:sp>
+        <p:nvSpPr>
+          <p:cNvPr id="4" name="TextBox 3"/>
+          <p:cNvSpPr txBox="1"/>
+          <p:nvPr/>
+        </p:nvSpPr>
+        <p:spPr>
+          <a:xfrm>
+            <a:off x="640080" y="4128516"/>
+            <a:ext cx="10911535" cy="310896"/>
+          </a:xfrm>
+          <a:prstGeom prst="rect">
+            <a:avLst/>
+          </a:prstGeom>
+          <a:noFill/>
+        </p:spPr>
+        <p:txBody>
+          <a:bodyPr wrap="square">
+            <a:spAutoFit/>
+          </a:bodyPr>
+          <a:lstStyle/>
+          <a:p>
+            <a:pPr algn="ctr"/>
+            <a:r>
+              <a:rPr sz="2000" b="0" i="0">
+                <a:solidFill>
+                  <a:srgbClr val="828282"/>
+                </a:solidFill>
+                <a:latin typeface="Arial"/>
+              </a:rPr>
+              <a:t>決して私たちを見捨てない</a:t>
+            </a:r>
+          </a:p>
+        </p:txBody>
+      </p:sp>
+      <p:sp>
+        <p:nvSpPr>
+          <p:cNvPr id="5" name="TextBox 4"/>
+          <p:cNvSpPr txBox="1"/>
+          <p:nvPr/>
+        </p:nvSpPr>
+        <p:spPr>
+          <a:xfrm>
+            <a:off x="640080" y="4494276"/>
+            <a:ext cx="10911535" cy="310896"/>
+          </a:xfrm>
+          <a:prstGeom prst="rect">
+            <a:avLst/>
+          </a:prstGeom>
+          <a:noFill/>
+        </p:spPr>
+        <p:txBody>
+          <a:bodyPr wrap="square">
+            <a:spAutoFit/>
+          </a:bodyPr>
+          <a:lstStyle/>
+          <a:p>
+            <a:pPr algn="ctr"/>
+            <a:r>
+              <a:rPr sz="2000" b="0" i="0">
+                <a:solidFill>
+                  <a:srgbClr val="828282"/>
+                </a:solidFill>
+                <a:latin typeface="Arial"/>
+              </a:rPr>
+              <a:t>神は私たちのために、抱き締めたいと願う</a:t>
+            </a:r>
+          </a:p>
+        </p:txBody>
+      </p:sp>
     </p:spTree>
   </p:cSld>
   <p:clrMapOvr>
@@ -4450,6 +5010,76 @@
           </a:p>
         </p:txBody>
       </p:sp>
+      <p:sp>
+        <p:nvSpPr>
+          <p:cNvPr id="4" name="TextBox 3"/>
+          <p:cNvSpPr txBox="1"/>
+          <p:nvPr/>
+        </p:nvSpPr>
+        <p:spPr>
+          <a:xfrm>
+            <a:off x="640080" y="4128516"/>
+            <a:ext cx="10911535" cy="310896"/>
+          </a:xfrm>
+          <a:prstGeom prst="rect">
+            <a:avLst/>
+          </a:prstGeom>
+          <a:noFill/>
+        </p:spPr>
+        <p:txBody>
+          <a:bodyPr wrap="square">
+            <a:spAutoFit/>
+          </a:bodyPr>
+          <a:lstStyle/>
+          <a:p>
+            <a:pPr algn="ctr"/>
+            <a:r>
+              <a:rPr sz="2000" b="0" i="0">
+                <a:solidFill>
+                  <a:srgbClr val="828282"/>
+                </a:solidFill>
+                <a:latin typeface="Arial"/>
+              </a:rPr>
+              <a:t>私たちが求める以上に</a:t>
+            </a:r>
+          </a:p>
+        </p:txBody>
+      </p:sp>
+      <p:sp>
+        <p:nvSpPr>
+          <p:cNvPr id="5" name="TextBox 4"/>
+          <p:cNvSpPr txBox="1"/>
+          <p:nvPr/>
+        </p:nvSpPr>
+        <p:spPr>
+          <a:xfrm>
+            <a:off x="640080" y="4494276"/>
+            <a:ext cx="10911535" cy="310896"/>
+          </a:xfrm>
+          <a:prstGeom prst="rect">
+            <a:avLst/>
+          </a:prstGeom>
+          <a:noFill/>
+        </p:spPr>
+        <p:txBody>
+          <a:bodyPr wrap="square">
+            <a:spAutoFit/>
+          </a:bodyPr>
+          <a:lstStyle/>
+          <a:p>
+            <a:pPr algn="ctr"/>
+            <a:r>
+              <a:rPr sz="2000" b="0" i="0">
+                <a:solidFill>
+                  <a:srgbClr val="828282"/>
+                </a:solidFill>
+                <a:latin typeface="Arial"/>
+              </a:rPr>
+              <a:t>私たちが願う以上に</a:t>
+            </a:r>
+          </a:p>
+        </p:txBody>
+      </p:sp>
     </p:spTree>
   </p:cSld>
   <p:clrMapOvr>
@@ -4511,6 +5141,41 @@
           </a:p>
         </p:txBody>
       </p:sp>
+      <p:sp>
+        <p:nvSpPr>
+          <p:cNvPr id="3" name="TextBox 2"/>
+          <p:cNvSpPr txBox="1"/>
+          <p:nvPr/>
+        </p:nvSpPr>
+        <p:spPr>
+          <a:xfrm>
+            <a:off x="640080" y="3845052"/>
+            <a:ext cx="10911535" cy="310896"/>
+          </a:xfrm>
+          <a:prstGeom prst="rect">
+            <a:avLst/>
+          </a:prstGeom>
+          <a:noFill/>
+        </p:spPr>
+        <p:txBody>
+          <a:bodyPr wrap="square">
+            <a:spAutoFit/>
+          </a:bodyPr>
+          <a:lstStyle/>
+          <a:p>
+            <a:pPr algn="ctr"/>
+            <a:r>
+              <a:rPr sz="2000" b="0" i="0">
+                <a:solidFill>
+                  <a:srgbClr val="828282"/>
+                </a:solidFill>
+                <a:latin typeface="Arial"/>
+              </a:rPr>
+              <a:t>大いなる業をなさる</a:t>
+            </a:r>
+          </a:p>
+        </p:txBody>
+      </p:sp>
     </p:spTree>
   </p:cSld>
   <p:clrMapOvr>
@@ -4607,6 +5272,76 @@
           </a:p>
         </p:txBody>
       </p:sp>
+      <p:sp>
+        <p:nvSpPr>
+          <p:cNvPr id="4" name="TextBox 3"/>
+          <p:cNvSpPr txBox="1"/>
+          <p:nvPr/>
+        </p:nvSpPr>
+        <p:spPr>
+          <a:xfrm>
+            <a:off x="640080" y="4128516"/>
+            <a:ext cx="10911535" cy="310896"/>
+          </a:xfrm>
+          <a:prstGeom prst="rect">
+            <a:avLst/>
+          </a:prstGeom>
+          <a:noFill/>
+        </p:spPr>
+        <p:txBody>
+          <a:bodyPr wrap="square">
+            <a:spAutoFit/>
+          </a:bodyPr>
+          <a:lstStyle/>
+          <a:p>
+            <a:pPr algn="ctr"/>
+            <a:r>
+              <a:rPr sz="2000" b="0" i="0">
+                <a:solidFill>
+                  <a:srgbClr val="828282"/>
+                </a:solidFill>
+                <a:latin typeface="Arial"/>
+              </a:rPr>
+              <a:t>よみがえり、死に勝利された</a:t>
+            </a:r>
+          </a:p>
+        </p:txBody>
+      </p:sp>
+      <p:sp>
+        <p:nvSpPr>
+          <p:cNvPr id="5" name="TextBox 4"/>
+          <p:cNvSpPr txBox="1"/>
+          <p:nvPr/>
+        </p:nvSpPr>
+        <p:spPr>
+          <a:xfrm>
+            <a:off x="640080" y="4494276"/>
+            <a:ext cx="10911535" cy="310896"/>
+          </a:xfrm>
+          <a:prstGeom prst="rect">
+            <a:avLst/>
+          </a:prstGeom>
+          <a:noFill/>
+        </p:spPr>
+        <p:txBody>
+          <a:bodyPr wrap="square">
+            <a:spAutoFit/>
+          </a:bodyPr>
+          <a:lstStyle/>
+          <a:p>
+            <a:pPr algn="ctr"/>
+            <a:r>
+              <a:rPr sz="2000" b="0" i="0">
+                <a:solidFill>
+                  <a:srgbClr val="828282"/>
+                </a:solidFill>
+                <a:latin typeface="Arial"/>
+              </a:rPr>
+              <a:t>私たちの神は力強い</a:t>
+            </a:r>
+          </a:p>
+        </p:txBody>
+      </p:sp>
     </p:spTree>
   </p:cSld>
   <p:clrMapOvr>
@@ -4703,6 +5438,76 @@
           </a:p>
         </p:txBody>
       </p:sp>
+      <p:sp>
+        <p:nvSpPr>
+          <p:cNvPr id="4" name="TextBox 3"/>
+          <p:cNvSpPr txBox="1"/>
+          <p:nvPr/>
+        </p:nvSpPr>
+        <p:spPr>
+          <a:xfrm>
+            <a:off x="640080" y="4128516"/>
+            <a:ext cx="10911535" cy="310896"/>
+          </a:xfrm>
+          <a:prstGeom prst="rect">
+            <a:avLst/>
+          </a:prstGeom>
+          <a:noFill/>
+        </p:spPr>
+        <p:txBody>
+          <a:bodyPr wrap="square">
+            <a:spAutoFit/>
+          </a:bodyPr>
+          <a:lstStyle/>
+          <a:p>
+            <a:pPr algn="ctr"/>
+            <a:r>
+              <a:rPr sz="2000" b="0" i="0">
+                <a:solidFill>
+                  <a:srgbClr val="828282"/>
+                </a:solidFill>
+                <a:latin typeface="Arial"/>
+              </a:rPr>
+              <a:t>み名によって私たちは勝利する</a:t>
+            </a:r>
+          </a:p>
+        </p:txBody>
+      </p:sp>
+      <p:sp>
+        <p:nvSpPr>
+          <p:cNvPr id="5" name="TextBox 4"/>
+          <p:cNvSpPr txBox="1"/>
+          <p:nvPr/>
+        </p:nvSpPr>
+        <p:spPr>
+          <a:xfrm>
+            <a:off x="640080" y="4494276"/>
+            <a:ext cx="10911535" cy="310896"/>
+          </a:xfrm>
+          <a:prstGeom prst="rect">
+            <a:avLst/>
+          </a:prstGeom>
+          <a:noFill/>
+        </p:spPr>
+        <p:txBody>
+          <a:bodyPr wrap="square">
+            <a:spAutoFit/>
+          </a:bodyPr>
+          <a:lstStyle/>
+          <a:p>
+            <a:pPr algn="ctr"/>
+            <a:r>
+              <a:rPr sz="2000" b="0" i="0">
+                <a:solidFill>
+                  <a:srgbClr val="828282"/>
+                </a:solidFill>
+                <a:latin typeface="Arial"/>
+              </a:rPr>
+              <a:t>私たちの神は力強い</a:t>
+            </a:r>
+          </a:p>
+        </p:txBody>
+      </p:sp>
     </p:spTree>
   </p:cSld>
   <p:clrMapOvr>
@@ -4799,6 +5604,76 @@
           </a:p>
         </p:txBody>
       </p:sp>
+      <p:sp>
+        <p:nvSpPr>
+          <p:cNvPr id="4" name="TextBox 3"/>
+          <p:cNvSpPr txBox="1"/>
+          <p:nvPr/>
+        </p:nvSpPr>
+        <p:spPr>
+          <a:xfrm>
+            <a:off x="640080" y="4128516"/>
+            <a:ext cx="10911535" cy="310896"/>
+          </a:xfrm>
+          <a:prstGeom prst="rect">
+            <a:avLst/>
+          </a:prstGeom>
+          <a:noFill/>
+        </p:spPr>
+        <p:txBody>
+          <a:bodyPr wrap="square">
+            <a:spAutoFit/>
+          </a:bodyPr>
+          <a:lstStyle/>
+          <a:p>
+            <a:pPr algn="ctr"/>
+            <a:r>
+              <a:rPr sz="2000" b="0" i="0">
+                <a:solidFill>
+                  <a:srgbClr val="828282"/>
+                </a:solidFill>
+                <a:latin typeface="Arial"/>
+              </a:rPr>
+              <a:t>私たちの神は力強い</a:t>
+            </a:r>
+          </a:p>
+        </p:txBody>
+      </p:sp>
+      <p:sp>
+        <p:nvSpPr>
+          <p:cNvPr id="5" name="TextBox 4"/>
+          <p:cNvSpPr txBox="1"/>
+          <p:nvPr/>
+        </p:nvSpPr>
+        <p:spPr>
+          <a:xfrm>
+            <a:off x="640080" y="4494276"/>
+            <a:ext cx="10911535" cy="310896"/>
+          </a:xfrm>
+          <a:prstGeom prst="rect">
+            <a:avLst/>
+          </a:prstGeom>
+          <a:noFill/>
+        </p:spPr>
+        <p:txBody>
+          <a:bodyPr wrap="square">
+            <a:spAutoFit/>
+          </a:bodyPr>
+          <a:lstStyle/>
+          <a:p>
+            <a:pPr algn="ctr"/>
+            <a:r>
+              <a:rPr sz="2000" b="0" i="0">
+                <a:solidFill>
+                  <a:srgbClr val="828282"/>
+                </a:solidFill>
+                <a:latin typeface="Arial"/>
+              </a:rPr>
+              <a:t>み名によって私たちは勝利する</a:t>
+            </a:r>
+          </a:p>
+        </p:txBody>
+      </p:sp>
     </p:spTree>
   </p:cSld>
   <p:clrMapOvr>
@@ -4895,6 +5770,76 @@
           </a:p>
         </p:txBody>
       </p:sp>
+      <p:sp>
+        <p:nvSpPr>
+          <p:cNvPr id="4" name="TextBox 3"/>
+          <p:cNvSpPr txBox="1"/>
+          <p:nvPr/>
+        </p:nvSpPr>
+        <p:spPr>
+          <a:xfrm>
+            <a:off x="640080" y="4128516"/>
+            <a:ext cx="10911535" cy="310896"/>
+          </a:xfrm>
+          <a:prstGeom prst="rect">
+            <a:avLst/>
+          </a:prstGeom>
+          <a:noFill/>
+        </p:spPr>
+        <p:txBody>
+          <a:bodyPr wrap="square">
+            <a:spAutoFit/>
+          </a:bodyPr>
+          <a:lstStyle/>
+          <a:p>
+            <a:pPr algn="ctr"/>
+            <a:r>
+              <a:rPr sz="2000" b="0" i="0">
+                <a:solidFill>
+                  <a:srgbClr val="828282"/>
+                </a:solidFill>
+                <a:latin typeface="Arial"/>
+              </a:rPr>
+              <a:t>私たちの神は力強い</a:t>
+            </a:r>
+          </a:p>
+        </p:txBody>
+      </p:sp>
+      <p:sp>
+        <p:nvSpPr>
+          <p:cNvPr id="5" name="TextBox 4"/>
+          <p:cNvSpPr txBox="1"/>
+          <p:nvPr/>
+        </p:nvSpPr>
+        <p:spPr>
+          <a:xfrm>
+            <a:off x="640080" y="4494276"/>
+            <a:ext cx="10911535" cy="310896"/>
+          </a:xfrm>
+          <a:prstGeom prst="rect">
+            <a:avLst/>
+          </a:prstGeom>
+          <a:noFill/>
+        </p:spPr>
+        <p:txBody>
+          <a:bodyPr wrap="square">
+            <a:spAutoFit/>
+          </a:bodyPr>
+          <a:lstStyle/>
+          <a:p>
+            <a:pPr algn="ctr"/>
+            <a:r>
+              <a:rPr sz="2000" b="0" i="0">
+                <a:solidFill>
+                  <a:srgbClr val="828282"/>
+                </a:solidFill>
+                <a:latin typeface="Arial"/>
+              </a:rPr>
+              <a:t>神は私たちとともに、導いてくださる</a:t>
+            </a:r>
+          </a:p>
+        </p:txBody>
+      </p:sp>
     </p:spTree>
   </p:cSld>
   <p:clrMapOvr>
@@ -4987,6 +5932,76 @@
                 <a:latin typeface="Arial"/>
               </a:rPr>
               <a:t>Deus por nós, quer nos abraçar</a:t>
+            </a:r>
+          </a:p>
+        </p:txBody>
+      </p:sp>
+      <p:sp>
+        <p:nvSpPr>
+          <p:cNvPr id="4" name="TextBox 3"/>
+          <p:cNvSpPr txBox="1"/>
+          <p:nvPr/>
+        </p:nvSpPr>
+        <p:spPr>
+          <a:xfrm>
+            <a:off x="640080" y="4128516"/>
+            <a:ext cx="10911535" cy="310896"/>
+          </a:xfrm>
+          <a:prstGeom prst="rect">
+            <a:avLst/>
+          </a:prstGeom>
+          <a:noFill/>
+        </p:spPr>
+        <p:txBody>
+          <a:bodyPr wrap="square">
+            <a:spAutoFit/>
+          </a:bodyPr>
+          <a:lstStyle/>
+          <a:p>
+            <a:pPr algn="ctr"/>
+            <a:r>
+              <a:rPr sz="2000" b="0" i="0">
+                <a:solidFill>
+                  <a:srgbClr val="828282"/>
+                </a:solidFill>
+                <a:latin typeface="Arial"/>
+              </a:rPr>
+              <a:t>決して私たちを見捨てない</a:t>
+            </a:r>
+          </a:p>
+        </p:txBody>
+      </p:sp>
+      <p:sp>
+        <p:nvSpPr>
+          <p:cNvPr id="5" name="TextBox 4"/>
+          <p:cNvSpPr txBox="1"/>
+          <p:nvPr/>
+        </p:nvSpPr>
+        <p:spPr>
+          <a:xfrm>
+            <a:off x="640080" y="4494276"/>
+            <a:ext cx="10911535" cy="310896"/>
+          </a:xfrm>
+          <a:prstGeom prst="rect">
+            <a:avLst/>
+          </a:prstGeom>
+          <a:noFill/>
+        </p:spPr>
+        <p:txBody>
+          <a:bodyPr wrap="square">
+            <a:spAutoFit/>
+          </a:bodyPr>
+          <a:lstStyle/>
+          <a:p>
+            <a:pPr algn="ctr"/>
+            <a:r>
+              <a:rPr sz="2000" b="0" i="0">
+                <a:solidFill>
+                  <a:srgbClr val="828282"/>
+                </a:solidFill>
+                <a:latin typeface="Arial"/>
+              </a:rPr>
+              <a:t>神は私たちのために、抱き締めたいと願う</a:t>
             </a:r>
           </a:p>
         </p:txBody>
